--- a/备选资产/结构图/目标与KPI映射-001/example.pptx
+++ b/备选资产/结构图/目标与KPI映射-001/example.pptx
@@ -2,13 +2,13 @@
 <file path=ppt/presentation.xml><?xml version="1.0" encoding="utf-8"?>
 <p:presentation xmlns:p="http://schemas.openxmlformats.org/presentationml/2006/main">
   <p:sldMasterIdLst>
-    <p:sldMasterId xmlns:r="http://schemas.openxmlformats.org/officeDocument/2006/relationships" id="2147483648" r:id="R37c29d32679446d4"/>
+    <p:sldMasterId xmlns:r="http://schemas.openxmlformats.org/officeDocument/2006/relationships" id="2147483648" r:id="Rabdbdfe580c94be3"/>
   </p:sldMasterIdLst>
   <p:notesMasterIdLst>
-    <p:notesMasterId xmlns:r="http://schemas.openxmlformats.org/officeDocument/2006/relationships" r:id="Rd6dbac62197e4eca"/>
+    <p:notesMasterId xmlns:r="http://schemas.openxmlformats.org/officeDocument/2006/relationships" r:id="Rab1cfdc9df334eca"/>
   </p:notesMasterIdLst>
   <p:sldIdLst>
-    <p:sldId xmlns:r="http://schemas.openxmlformats.org/officeDocument/2006/relationships" id="256" r:id="R555277c61c374349"/>
+    <p:sldId xmlns:r="http://schemas.openxmlformats.org/officeDocument/2006/relationships" id="256" r:id="R8d7cb050db4f454b"/>
   </p:sldIdLst>
   <p:sldSz cx="12192000" cy="6858000"/>
   <p:notesSz cx="6858000" cy="9144000"/>
@@ -506,7 +506,7 @@
   </p:cSld>
   <p:clrMap bg1="lt1" tx1="dk1" bg2="lt2" tx2="dk2" accent1="accent1" accent2="accent2" accent3="accent3" accent4="accent4" accent5="accent5" accent6="accent6" hlink="hlink" folHlink="folHlink"/>
   <p:sldLayoutIdLst>
-    <p:sldLayoutId xmlns:r="http://schemas.openxmlformats.org/officeDocument/2006/relationships" id="2147483649" r:id="Rf5ab6ab04cab4135"/>
+    <p:sldLayoutId xmlns:r="http://schemas.openxmlformats.org/officeDocument/2006/relationships" id="2147483649" r:id="R60979635f210460d"/>
   </p:sldLayoutIdLst>
   <p:txStyles>
     <p:titleStyle>
@@ -1054,10 +1054,10 @@
       </p:grpSpPr>
       <p:sp>
         <p:nvSpPr>
-          <p:cNvPr id="20" name="">
-            <a:extLst xmlns:a="http://schemas.openxmlformats.org/drawingml/2006/main">
-              <a:ext uri="{FF2B5EF4-FFF2-40B4-BE49-F238E27FC236}">
-                <a16:creationId xmlns:a16="http://schemas.microsoft.com/office/drawing/2014/main" id="{B56DC2EA-20DA-4C69-B5F6-16F1B871A2C1}"/>
+          <p:cNvPr id="60" name="">
+            <a:extLst xmlns:a="http://schemas.openxmlformats.org/drawingml/2006/main">
+              <a:ext uri="{FF2B5EF4-FFF2-40B4-BE49-F238E27FC236}">
+                <a16:creationId xmlns:a16="http://schemas.microsoft.com/office/drawing/2014/main" id="{8A2D9090-1911-42F9-BD6A-21958F7BA5BA}"/>
               </a:ext>
             </a:extLst>
           </p:cNvPr>
@@ -1115,7 +1115,7 @@
           <p:cNvPr id="2" name="">
             <a:extLst xmlns:a="http://schemas.openxmlformats.org/drawingml/2006/main">
               <a:ext uri="{FF2B5EF4-FFF2-40B4-BE49-F238E27FC236}">
-                <a16:creationId xmlns:a16="http://schemas.microsoft.com/office/drawing/2014/main" id="{76FBD9A0-91D9-443A-B54D-407E8AF7B089}"/>
+                <a16:creationId xmlns:a16="http://schemas.microsoft.com/office/drawing/2014/main" id="{0D5932BD-958A-4151-81BF-AEB748C5CDCC}"/>
               </a:ext>
             </a:extLst>
           </p:cNvPr>
@@ -1163,106 +1163,40 @@
                 <a:ea typeface="Microsoft YaHei"/>
                 <a:cs typeface="Microsoft YaHei"/>
               </a:rPr>
-              <a:t>目标与 KPI 映射</a:t>
+              <a:t>总目标 · 单元指标 · 结果贡献</a:t>
             </a:r>
           </a:p>
         </p:txBody>
       </p:sp>
       <p:sp>
         <p:nvSpPr>
-          <p:cNvPr id="3" name="">
-            <a:extLst xmlns:a="http://schemas.openxmlformats.org/drawingml/2006/main">
-              <a:ext uri="{FF2B5EF4-FFF2-40B4-BE49-F238E27FC236}">
-                <a16:creationId xmlns:a16="http://schemas.microsoft.com/office/drawing/2014/main" id="{C8277B87-E8BA-40D0-AB45-2989AF2303AD}"/>
-              </a:ext>
-            </a:extLst>
-          </p:cNvPr>
-          <p:cNvSpPr>
-            <a:spLocks xmlns:a="http://schemas.openxmlformats.org/drawingml/2006/main" noGrp="1"/>
-          </p:cNvSpPr>
-          <p:nvPr/>
-        </p:nvSpPr>
-        <p:spPr>
-          <a:xfrm xmlns:a="http://schemas.openxmlformats.org/drawingml/2006/main">
-            <a:off x="0" y="1809750"/>
-            <a:ext cx="2857500" cy="3429000"/>
-          </a:xfrm>
-          <a:prstGeom xmlns:a="http://schemas.openxmlformats.org/drawingml/2006/main" prst="ellipse">
-            <a:avLst/>
+          <p:cNvPr id="3" name="PPAGENT_QA|parent=goal-kpi-goal">
+            <a:extLst xmlns:a="http://schemas.openxmlformats.org/drawingml/2006/main">
+              <a:ext uri="{FF2B5EF4-FFF2-40B4-BE49-F238E27FC236}">
+                <a16:creationId xmlns:a16="http://schemas.microsoft.com/office/drawing/2014/main" id="{665C431F-6DD7-4CAD-8DC2-31E9A4B296A9}"/>
+              </a:ext>
+            </a:extLst>
+          </p:cNvPr>
+          <p:cNvSpPr>
+            <a:spLocks xmlns:a="http://schemas.openxmlformats.org/drawingml/2006/main" noGrp="1"/>
+          </p:cNvSpPr>
+          <p:nvPr/>
+        </p:nvSpPr>
+        <p:spPr>
+          <a:xfrm xmlns:a="http://schemas.openxmlformats.org/drawingml/2006/main">
+            <a:off x="457200" y="1333500"/>
+            <a:ext cx="11277600" cy="514350"/>
+          </a:xfrm>
+          <a:prstGeom xmlns:a="http://schemas.openxmlformats.org/drawingml/2006/main" prst="roundRect">
+            <a:avLst>
+              <a:gd name="adj" fmla="val 22222"/>
+            </a:avLst>
           </a:prstGeom>
           <a:solidFill xmlns:a="http://schemas.openxmlformats.org/drawingml/2006/main">
-            <a:srgbClr val="1677C8"/>
+            <a:srgbClr val="315AA7"/>
           </a:solidFill>
           <a:ln xmlns:a="http://schemas.openxmlformats.org/drawingml/2006/main" w="0">
             <a:noFill/>
-            <a:prstDash val="solid"/>
-          </a:ln>
-        </p:spPr>
-        <p:style>
-          <a:lnRef xmlns:a="http://schemas.openxmlformats.org/drawingml/2006/main" idx="0"/>
-          <a:fillRef xmlns:a="http://schemas.openxmlformats.org/drawingml/2006/main" idx="0"/>
-          <a:effectRef xmlns:a="http://schemas.openxmlformats.org/drawingml/2006/main" idx="7"/>
-          <a:fontRef xmlns:a="http://schemas.openxmlformats.org/drawingml/2006/main" idx="major"/>
-        </p:style>
-        <p:txBody>
-          <a:bodyPr xmlns:a="http://schemas.openxmlformats.org/drawingml/2006/main" lIns="114300" tIns="76200" rIns="114300" bIns="76200" anchor="ctr">
-            <a:normAutofit fontScale="100000"/>
-          </a:bodyPr>
-          <a:lstStyle xmlns:a="http://schemas.openxmlformats.org/drawingml/2006/main"/>
-          <a:p xmlns:a="http://schemas.openxmlformats.org/drawingml/2006/main">
-            <a:pPr algn="ctr">
-              <a:defRPr sz="2550" b="1">
-                <a:solidFill>
-                  <a:srgbClr val="FFFFFF"/>
-                </a:solidFill>
-                <a:latin typeface="Microsoft YaHei"/>
-                <a:ea typeface="Microsoft YaHei"/>
-                <a:cs typeface="Microsoft YaHei"/>
-              </a:defRPr>
-            </a:pPr>
-            <a:r>
-              <a:rPr sz="2550" b="1">
-                <a:solidFill>
-                  <a:srgbClr val="FFFFFF"/>
-                </a:solidFill>
-                <a:latin typeface="Microsoft YaHei"/>
-                <a:ea typeface="Microsoft YaHei"/>
-                <a:cs typeface="Microsoft YaHei"/>
-              </a:rPr>
-              <a:t>目标完成情况</a:t>
-            </a:r>
-          </a:p>
-        </p:txBody>
-      </p:sp>
-      <p:sp>
-        <p:nvSpPr>
-          <p:cNvPr id="4" name="">
-            <a:extLst xmlns:a="http://schemas.openxmlformats.org/drawingml/2006/main">
-              <a:ext uri="{FF2B5EF4-FFF2-40B4-BE49-F238E27FC236}">
-                <a16:creationId xmlns:a16="http://schemas.microsoft.com/office/drawing/2014/main" id="{D87FBB7A-855B-4B57-9EE6-441A7A58A177}"/>
-              </a:ext>
-            </a:extLst>
-          </p:cNvPr>
-          <p:cNvSpPr>
-            <a:spLocks xmlns:a="http://schemas.openxmlformats.org/drawingml/2006/main" noGrp="1"/>
-          </p:cNvSpPr>
-          <p:nvPr/>
-        </p:nvSpPr>
-        <p:spPr>
-          <a:xfrm xmlns:a="http://schemas.openxmlformats.org/drawingml/2006/main">
-            <a:off x="2333625" y="1676400"/>
-            <a:ext cx="723900" cy="723900"/>
-          </a:xfrm>
-          <a:prstGeom xmlns:a="http://schemas.openxmlformats.org/drawingml/2006/main" prst="ellipse">
-            <a:avLst/>
-          </a:prstGeom>
-          <a:solidFill xmlns:a="http://schemas.openxmlformats.org/drawingml/2006/main">
-            <a:srgbClr val="14CBD1"/>
-          </a:solidFill>
-          <a:ln xmlns:a="http://schemas.openxmlformats.org/drawingml/2006/main" w="19050">
-            <a:solidFill>
-              <a:srgbClr val="FFFFFF"/>
-            </a:solidFill>
             <a:prstDash val="solid"/>
           </a:ln>
         </p:spPr>
@@ -1279,7 +1213,7 @@
           <a:lstStyle xmlns:a="http://schemas.openxmlformats.org/drawingml/2006/main"/>
           <a:p xmlns:a="http://schemas.openxmlformats.org/drawingml/2006/main">
             <a:pPr algn="ctr">
-              <a:defRPr sz="2100" b="1">
+              <a:defRPr sz="1650" b="1">
                 <a:solidFill>
                   <a:srgbClr val="FFFFFF"/>
                 </a:solidFill>
@@ -1289,7 +1223,7 @@
               </a:defRPr>
             </a:pPr>
             <a:r>
-              <a:rPr sz="2100" b="1">
+              <a:rPr sz="1650" b="1">
                 <a:solidFill>
                   <a:srgbClr val="FFFFFF"/>
                 </a:solidFill>
@@ -1297,155 +1231,72 @@
                 <a:ea typeface="Microsoft YaHei"/>
                 <a:cs typeface="Microsoft YaHei"/>
               </a:rPr>
-              <a:t>✓</a:t>
+              <a:t>年度总目标：稳定增长、提升体验并形成可持续能力</a:t>
             </a:r>
           </a:p>
         </p:txBody>
       </p:sp>
       <p:sp>
         <p:nvSpPr>
-          <p:cNvPr id="5" name="">
-            <a:extLst xmlns:a="http://schemas.openxmlformats.org/drawingml/2006/main">
-              <a:ext uri="{FF2B5EF4-FFF2-40B4-BE49-F238E27FC236}">
-                <a16:creationId xmlns:a16="http://schemas.microsoft.com/office/drawing/2014/main" id="{103D8862-13DD-47F4-85F1-EC2D53AEC77D}"/>
-              </a:ext>
-            </a:extLst>
-          </p:cNvPr>
-          <p:cNvSpPr>
-            <a:spLocks xmlns:a="http://schemas.openxmlformats.org/drawingml/2006/main" noGrp="1"/>
-          </p:cNvSpPr>
-          <p:nvPr/>
-        </p:nvSpPr>
-        <p:spPr>
-          <a:xfrm xmlns:a="http://schemas.openxmlformats.org/drawingml/2006/main">
-            <a:off x="3333750" y="1428750"/>
-            <a:ext cx="2857500" cy="381000"/>
-          </a:xfrm>
-          <a:prstGeom xmlns:a="http://schemas.openxmlformats.org/drawingml/2006/main" prst="rect">
+          <p:cNvPr id="4" name="PPAGENT_CONNECTOR|from=goal-kpi-goal|fromSide=bottom|to=goal-kpi-column-0|toSide=top">
+            <a:extLst xmlns:a="http://schemas.openxmlformats.org/drawingml/2006/main">
+              <a:ext uri="{FF2B5EF4-FFF2-40B4-BE49-F238E27FC236}">
+                <a16:creationId xmlns:a16="http://schemas.microsoft.com/office/drawing/2014/main" id="{BC8434A6-4804-4837-9952-0AF08D5CBAB4}"/>
+              </a:ext>
+            </a:extLst>
+          </p:cNvPr>
+          <p:cNvSpPr>
+            <a:spLocks xmlns:a="http://schemas.openxmlformats.org/drawingml/2006/main" noGrp="1"/>
+          </p:cNvSpPr>
+          <p:nvPr/>
+        </p:nvSpPr>
+        <p:spPr>
+          <a:xfrm xmlns:a="http://schemas.openxmlformats.org/drawingml/2006/main" flipH="1" flipV="0">
+            <a:off x="1539240" y="1847850"/>
+            <a:ext cx="4556760" cy="342900"/>
+          </a:xfrm>
+          <a:prstGeom xmlns:a="http://schemas.openxmlformats.org/drawingml/2006/main" prst="line">
             <a:avLst/>
           </a:prstGeom>
           <a:noFill xmlns:a="http://schemas.openxmlformats.org/drawingml/2006/main"/>
-          <a:ln xmlns:a="http://schemas.openxmlformats.org/drawingml/2006/main" w="0">
-            <a:noFill/>
-            <a:prstDash val="solid"/>
-          </a:ln>
-        </p:spPr>
-        <p:txBody>
-          <a:bodyPr xmlns:a="http://schemas.openxmlformats.org/drawingml/2006/main" lIns="0" tIns="0" rIns="0" bIns="0" anchor="ctr">
-            <a:normAutofit fontScale="100000"/>
-          </a:bodyPr>
-          <a:lstStyle xmlns:a="http://schemas.openxmlformats.org/drawingml/2006/main"/>
-          <a:p xmlns:a="http://schemas.openxmlformats.org/drawingml/2006/main">
-            <a:pPr algn="l">
-              <a:defRPr sz="1725" b="1">
-                <a:solidFill>
-                  <a:srgbClr val="1677C8"/>
-                </a:solidFill>
-                <a:latin typeface="Microsoft YaHei"/>
-                <a:ea typeface="Microsoft YaHei"/>
-                <a:cs typeface="Microsoft YaHei"/>
-              </a:defRPr>
-            </a:pPr>
-            <a:r>
-              <a:rPr sz="1725" b="1">
-                <a:solidFill>
-                  <a:srgbClr val="1677C8"/>
-                </a:solidFill>
-                <a:latin typeface="Microsoft YaHei"/>
-                <a:ea typeface="Microsoft YaHei"/>
-                <a:cs typeface="Microsoft YaHei"/>
-              </a:rPr>
-              <a:t>目标一</a:t>
-            </a:r>
-          </a:p>
-        </p:txBody>
-      </p:sp>
-      <p:sp>
-        <p:nvSpPr>
-          <p:cNvPr id="6" name="">
-            <a:extLst xmlns:a="http://schemas.openxmlformats.org/drawingml/2006/main">
-              <a:ext uri="{FF2B5EF4-FFF2-40B4-BE49-F238E27FC236}">
-                <a16:creationId xmlns:a16="http://schemas.microsoft.com/office/drawing/2014/main" id="{8262C415-69B5-4DB7-A274-E5AE43FF55E4}"/>
-              </a:ext>
-            </a:extLst>
-          </p:cNvPr>
-          <p:cNvSpPr>
-            <a:spLocks xmlns:a="http://schemas.openxmlformats.org/drawingml/2006/main" noGrp="1"/>
-          </p:cNvSpPr>
-          <p:nvPr/>
-        </p:nvSpPr>
-        <p:spPr>
-          <a:xfrm xmlns:a="http://schemas.openxmlformats.org/drawingml/2006/main">
-            <a:off x="3333750" y="1866900"/>
-            <a:ext cx="2857500" cy="723900"/>
-          </a:xfrm>
-          <a:prstGeom xmlns:a="http://schemas.openxmlformats.org/drawingml/2006/main" prst="rect">
-            <a:avLst/>
-          </a:prstGeom>
-          <a:noFill xmlns:a="http://schemas.openxmlformats.org/drawingml/2006/main"/>
-          <a:ln xmlns:a="http://schemas.openxmlformats.org/drawingml/2006/main" w="0">
-            <a:noFill/>
-            <a:prstDash val="solid"/>
-          </a:ln>
-        </p:spPr>
-        <p:txBody>
-          <a:bodyPr xmlns:a="http://schemas.openxmlformats.org/drawingml/2006/main" lIns="0" tIns="0" rIns="0" bIns="0" anchor="t">
-            <a:normAutofit fontScale="100000"/>
-          </a:bodyPr>
-          <a:lstStyle xmlns:a="http://schemas.openxmlformats.org/drawingml/2006/main"/>
-          <a:p xmlns:a="http://schemas.openxmlformats.org/drawingml/2006/main">
-            <a:pPr algn="l">
-              <a:defRPr sz="1200" b="0">
-                <a:solidFill>
-                  <a:srgbClr val="475569"/>
-                </a:solidFill>
-                <a:latin typeface="Microsoft YaHei"/>
-                <a:ea typeface="Microsoft YaHei"/>
-                <a:cs typeface="Microsoft YaHei"/>
-              </a:defRPr>
-            </a:pPr>
-            <a:r>
-              <a:rPr sz="1200" b="0">
-                <a:solidFill>
-                  <a:srgbClr val="475569"/>
-                </a:solidFill>
-                <a:latin typeface="Microsoft YaHei"/>
-                <a:ea typeface="Microsoft YaHei"/>
-                <a:cs typeface="Microsoft YaHei"/>
-              </a:rPr>
-              <a:t>说明目标及其完成情况</a:t>
-            </a:r>
-          </a:p>
-        </p:txBody>
-      </p:sp>
-      <p:sp>
-        <p:nvSpPr>
-          <p:cNvPr id="7" name="">
-            <a:extLst xmlns:a="http://schemas.openxmlformats.org/drawingml/2006/main">
-              <a:ext uri="{FF2B5EF4-FFF2-40B4-BE49-F238E27FC236}">
-                <a16:creationId xmlns:a16="http://schemas.microsoft.com/office/drawing/2014/main" id="{D70BF513-8056-4FB9-A591-DBEA935B360D}"/>
-              </a:ext>
-            </a:extLst>
-          </p:cNvPr>
-          <p:cNvSpPr>
-            <a:spLocks xmlns:a="http://schemas.openxmlformats.org/drawingml/2006/main" noGrp="1"/>
-          </p:cNvSpPr>
-          <p:nvPr/>
-        </p:nvSpPr>
-        <p:spPr>
-          <a:xfrm xmlns:a="http://schemas.openxmlformats.org/drawingml/2006/main">
-            <a:off x="6477000" y="1581150"/>
-            <a:ext cx="990600" cy="990600"/>
-          </a:xfrm>
-          <a:prstGeom xmlns:a="http://schemas.openxmlformats.org/drawingml/2006/main" prst="ellipse">
-            <a:avLst/>
-          </a:prstGeom>
-          <a:solidFill xmlns:a="http://schemas.openxmlformats.org/drawingml/2006/main">
-            <a:srgbClr val="FFFFFF"/>
-          </a:solidFill>
           <a:ln xmlns:a="http://schemas.openxmlformats.org/drawingml/2006/main" w="19050">
             <a:solidFill>
-              <a:srgbClr val="1677C8"/>
+              <a:srgbClr val="6483BB"/>
+            </a:solidFill>
+            <a:prstDash val="solid"/>
+          </a:ln>
+        </p:spPr>
+      </p:sp>
+      <p:sp>
+        <p:nvSpPr>
+          <p:cNvPr id="5" name="PPAGENT_QA|parent=goal-kpi-column-0|domains=goal-kpi-columns">
+            <a:extLst xmlns:a="http://schemas.openxmlformats.org/drawingml/2006/main">
+              <a:ext uri="{FF2B5EF4-FFF2-40B4-BE49-F238E27FC236}">
+                <a16:creationId xmlns:a16="http://schemas.microsoft.com/office/drawing/2014/main" id="{1D7CD88D-648F-480F-9317-8546897186A1}"/>
+              </a:ext>
+            </a:extLst>
+          </p:cNvPr>
+          <p:cNvSpPr>
+            <a:spLocks xmlns:a="http://schemas.openxmlformats.org/drawingml/2006/main" noGrp="1"/>
+          </p:cNvSpPr>
+          <p:nvPr/>
+        </p:nvSpPr>
+        <p:spPr>
+          <a:xfrm xmlns:a="http://schemas.openxmlformats.org/drawingml/2006/main">
+            <a:off x="457200" y="2190750"/>
+            <a:ext cx="2164080" cy="3429000"/>
+          </a:xfrm>
+          <a:prstGeom xmlns:a="http://schemas.openxmlformats.org/drawingml/2006/main" prst="roundRect">
+            <a:avLst>
+              <a:gd name="adj" fmla="val 5282"/>
+            </a:avLst>
+          </a:prstGeom>
+          <a:solidFill xmlns:a="http://schemas.openxmlformats.org/drawingml/2006/main">
+            <a:srgbClr val="F7FAFC"/>
+          </a:solidFill>
+          <a:ln xmlns:a="http://schemas.openxmlformats.org/drawingml/2006/main" w="9525">
+            <a:solidFill>
+              <a:srgbClr val="D8E3ED"/>
             </a:solidFill>
             <a:prstDash val="solid"/>
           </a:ln>
@@ -1456,16 +1307,49 @@
           <a:effectRef xmlns:a="http://schemas.openxmlformats.org/drawingml/2006/main" idx="4"/>
           <a:fontRef xmlns:a="http://schemas.openxmlformats.org/drawingml/2006/main" idx="major"/>
         </p:style>
+      </p:sp>
+      <p:sp>
+        <p:nvSpPr>
+          <p:cNvPr id="6" name="">
+            <a:extLst xmlns:a="http://schemas.openxmlformats.org/drawingml/2006/main">
+              <a:ext uri="{FF2B5EF4-FFF2-40B4-BE49-F238E27FC236}">
+                <a16:creationId xmlns:a16="http://schemas.microsoft.com/office/drawing/2014/main" id="{7FC9466F-67F0-49BE-A5CE-0FE73E5F8275}"/>
+              </a:ext>
+            </a:extLst>
+          </p:cNvPr>
+          <p:cNvSpPr>
+            <a:spLocks xmlns:a="http://schemas.openxmlformats.org/drawingml/2006/main" noGrp="1"/>
+          </p:cNvSpPr>
+          <p:nvPr/>
+        </p:nvSpPr>
+        <p:spPr>
+          <a:xfrm xmlns:a="http://schemas.openxmlformats.org/drawingml/2006/main">
+            <a:off x="457200" y="2190750"/>
+            <a:ext cx="2164080" cy="495300"/>
+          </a:xfrm>
+          <a:prstGeom xmlns:a="http://schemas.openxmlformats.org/drawingml/2006/main" prst="roundRect">
+            <a:avLst>
+              <a:gd name="adj" fmla="val 23077"/>
+            </a:avLst>
+          </a:prstGeom>
+          <a:solidFill xmlns:a="http://schemas.openxmlformats.org/drawingml/2006/main">
+            <a:srgbClr val="567AB8"/>
+          </a:solidFill>
+          <a:ln xmlns:a="http://schemas.openxmlformats.org/drawingml/2006/main" w="0">
+            <a:noFill/>
+            <a:prstDash val="solid"/>
+          </a:ln>
+        </p:spPr>
         <p:txBody>
           <a:bodyPr xmlns:a="http://schemas.openxmlformats.org/drawingml/2006/main" lIns="114300" tIns="76200" rIns="114300" bIns="76200" anchor="ctr">
-            <a:normAutofit fontScale="95556"/>
+            <a:normAutofit fontScale="100000"/>
           </a:bodyPr>
           <a:lstStyle xmlns:a="http://schemas.openxmlformats.org/drawingml/2006/main"/>
           <a:p xmlns:a="http://schemas.openxmlformats.org/drawingml/2006/main">
             <a:pPr algn="ctr">
-              <a:defRPr sz="1275" b="1">
-                <a:solidFill>
-                  <a:srgbClr val="1677C8"/>
+              <a:defRPr sz="1350" b="1">
+                <a:solidFill>
+                  <a:srgbClr val="FFFFFF"/>
                 </a:solidFill>
                 <a:latin typeface="Microsoft YaHei"/>
                 <a:ea typeface="Microsoft YaHei"/>
@@ -1473,22 +1357,80 @@
               </a:defRPr>
             </a:pPr>
             <a:r>
-              <a:rPr sz="1275" b="1">
-                <a:solidFill>
-                  <a:srgbClr val="1677C8"/>
+              <a:rPr sz="1350" b="1">
+                <a:solidFill>
+                  <a:srgbClr val="FFFFFF"/>
                 </a:solidFill>
                 <a:latin typeface="Microsoft YaHei"/>
                 <a:ea typeface="Microsoft YaHei"/>
                 <a:cs typeface="Microsoft YaHei"/>
               </a:rPr>
-              <a:t>10</a:t>
+              <a:t>内容运营</a:t>
+            </a:r>
+          </a:p>
+        </p:txBody>
+      </p:sp>
+      <p:sp>
+        <p:nvSpPr>
+          <p:cNvPr id="7" name="">
+            <a:extLst xmlns:a="http://schemas.openxmlformats.org/drawingml/2006/main">
+              <a:ext uri="{FF2B5EF4-FFF2-40B4-BE49-F238E27FC236}">
+                <a16:creationId xmlns:a16="http://schemas.microsoft.com/office/drawing/2014/main" id="{30B550B3-47C5-4499-8031-73FC88F543EF}"/>
+              </a:ext>
+            </a:extLst>
+          </p:cNvPr>
+          <p:cNvSpPr>
+            <a:spLocks xmlns:a="http://schemas.openxmlformats.org/drawingml/2006/main" noGrp="1"/>
+          </p:cNvSpPr>
+          <p:nvPr/>
+        </p:nvSpPr>
+        <p:spPr>
+          <a:xfrm xmlns:a="http://schemas.openxmlformats.org/drawingml/2006/main">
+            <a:off x="609600" y="2819400"/>
+            <a:ext cx="1859280" cy="590550"/>
+          </a:xfrm>
+          <a:prstGeom xmlns:a="http://schemas.openxmlformats.org/drawingml/2006/main" prst="rect">
+            <a:avLst/>
+          </a:prstGeom>
+          <a:noFill xmlns:a="http://schemas.openxmlformats.org/drawingml/2006/main"/>
+          <a:ln xmlns:a="http://schemas.openxmlformats.org/drawingml/2006/main" w="0">
+            <a:noFill/>
+            <a:prstDash val="solid"/>
+          </a:ln>
+        </p:spPr>
+        <p:txBody>
+          <a:bodyPr xmlns:a="http://schemas.openxmlformats.org/drawingml/2006/main" lIns="0" tIns="0" rIns="0" bIns="0" anchor="t">
+            <a:normAutofit fontScale="100000"/>
+          </a:bodyPr>
+          <a:lstStyle xmlns:a="http://schemas.openxmlformats.org/drawingml/2006/main"/>
+          <a:p xmlns:a="http://schemas.openxmlformats.org/drawingml/2006/main">
+            <a:pPr algn="ctr">
+              <a:defRPr sz="1200" b="0">
+                <a:solidFill>
+                  <a:srgbClr val="475569"/>
+                </a:solidFill>
+                <a:latin typeface="Microsoft YaHei"/>
+                <a:ea typeface="Microsoft YaHei"/>
+                <a:cs typeface="Microsoft YaHei"/>
+              </a:defRPr>
+            </a:pPr>
+            <a:r>
+              <a:rPr sz="1200" b="0">
+                <a:solidFill>
+                  <a:srgbClr val="475569"/>
+                </a:solidFill>
+                <a:latin typeface="Microsoft YaHei"/>
+                <a:ea typeface="Microsoft YaHei"/>
+                <a:cs typeface="Microsoft YaHei"/>
+              </a:rPr>
+              <a:t>提高优质内容</a:t>
             </a:r>
           </a:p>
           <a:p xmlns:a="http://schemas.openxmlformats.org/drawingml/2006/main">
             <a:pPr algn="ctr">
-              <a:defRPr sz="1275" b="1">
-                <a:solidFill>
-                  <a:srgbClr val="1677C8"/>
+              <a:defRPr sz="1200" b="0">
+                <a:solidFill>
+                  <a:srgbClr val="475569"/>
                 </a:solidFill>
                 <a:latin typeface="Microsoft YaHei"/>
                 <a:ea typeface="Microsoft YaHei"/>
@@ -1496,15 +1438,15 @@
               </a:defRPr>
             </a:pPr>
             <a:r>
-              <a:rPr sz="1275" b="1">
-                <a:solidFill>
-                  <a:srgbClr val="1677C8"/>
+              <a:rPr sz="1200" b="0">
+                <a:solidFill>
+                  <a:srgbClr val="475569"/>
                 </a:solidFill>
                 <a:latin typeface="Microsoft YaHei"/>
                 <a:ea typeface="Microsoft YaHei"/>
                 <a:cs typeface="Microsoft YaHei"/>
               </a:rPr>
-              <a:t>指标 A</a:t>
+              <a:t>供给与传播效率</a:t>
             </a:r>
           </a:p>
         </p:txBody>
@@ -1514,29 +1456,426 @@
           <p:cNvPr id="8" name="">
             <a:extLst xmlns:a="http://schemas.openxmlformats.org/drawingml/2006/main">
               <a:ext uri="{FF2B5EF4-FFF2-40B4-BE49-F238E27FC236}">
-                <a16:creationId xmlns:a16="http://schemas.microsoft.com/office/drawing/2014/main" id="{B78B43C5-C791-400F-BFDE-6D7C3E022F14}"/>
-              </a:ext>
-            </a:extLst>
-          </p:cNvPr>
-          <p:cNvSpPr>
-            <a:spLocks xmlns:a="http://schemas.openxmlformats.org/drawingml/2006/main" noGrp="1"/>
-          </p:cNvSpPr>
-          <p:nvPr/>
-        </p:nvSpPr>
-        <p:spPr>
-          <a:xfrm xmlns:a="http://schemas.openxmlformats.org/drawingml/2006/main">
-            <a:off x="7677150" y="1581150"/>
-            <a:ext cx="990600" cy="990600"/>
-          </a:xfrm>
-          <a:prstGeom xmlns:a="http://schemas.openxmlformats.org/drawingml/2006/main" prst="ellipse">
-            <a:avLst/>
+                <a16:creationId xmlns:a16="http://schemas.microsoft.com/office/drawing/2014/main" id="{E5924FE0-AFC9-40EF-AB72-073992F82215}"/>
+              </a:ext>
+            </a:extLst>
+          </p:cNvPr>
+          <p:cNvSpPr>
+            <a:spLocks xmlns:a="http://schemas.openxmlformats.org/drawingml/2006/main" noGrp="1"/>
+          </p:cNvSpPr>
+          <p:nvPr/>
+        </p:nvSpPr>
+        <p:spPr>
+          <a:xfrm xmlns:a="http://schemas.openxmlformats.org/drawingml/2006/main">
+            <a:off x="609600" y="3543300"/>
+            <a:ext cx="1859280" cy="476250"/>
+          </a:xfrm>
+          <a:prstGeom xmlns:a="http://schemas.openxmlformats.org/drawingml/2006/main" prst="roundRect">
+            <a:avLst>
+              <a:gd name="adj" fmla="val 24000"/>
+            </a:avLst>
           </a:prstGeom>
           <a:solidFill xmlns:a="http://schemas.openxmlformats.org/drawingml/2006/main">
             <a:srgbClr val="FFFFFF"/>
           </a:solidFill>
+          <a:ln xmlns:a="http://schemas.openxmlformats.org/drawingml/2006/main" w="9525">
+            <a:solidFill>
+              <a:srgbClr val="C7D8E7"/>
+            </a:solidFill>
+            <a:prstDash val="solid"/>
+          </a:ln>
+        </p:spPr>
+      </p:sp>
+      <p:sp>
+        <p:nvSpPr>
+          <p:cNvPr id="9" name="">
+            <a:extLst xmlns:a="http://schemas.openxmlformats.org/drawingml/2006/main">
+              <a:ext uri="{FF2B5EF4-FFF2-40B4-BE49-F238E27FC236}">
+                <a16:creationId xmlns:a16="http://schemas.microsoft.com/office/drawing/2014/main" id="{9CDBFDFC-C369-4435-80EB-0E04F01D118A}"/>
+              </a:ext>
+            </a:extLst>
+          </p:cNvPr>
+          <p:cNvSpPr>
+            <a:spLocks xmlns:a="http://schemas.openxmlformats.org/drawingml/2006/main" noGrp="1"/>
+          </p:cNvSpPr>
+          <p:nvPr/>
+        </p:nvSpPr>
+        <p:spPr>
+          <a:xfrm xmlns:a="http://schemas.openxmlformats.org/drawingml/2006/main">
+            <a:off x="704850" y="3609975"/>
+            <a:ext cx="767639" cy="342900"/>
+          </a:xfrm>
+          <a:prstGeom xmlns:a="http://schemas.openxmlformats.org/drawingml/2006/main" prst="rect">
+            <a:avLst/>
+          </a:prstGeom>
+          <a:noFill xmlns:a="http://schemas.openxmlformats.org/drawingml/2006/main"/>
+          <a:ln xmlns:a="http://schemas.openxmlformats.org/drawingml/2006/main" w="0">
+            <a:noFill/>
+            <a:prstDash val="solid"/>
+          </a:ln>
+        </p:spPr>
+        <p:txBody>
+          <a:bodyPr xmlns:a="http://schemas.openxmlformats.org/drawingml/2006/main" lIns="0" tIns="0" rIns="0" bIns="0" anchor="ctr">
+            <a:normAutofit fontScale="100000"/>
+          </a:bodyPr>
+          <a:lstStyle xmlns:a="http://schemas.openxmlformats.org/drawingml/2006/main"/>
+          <a:p xmlns:a="http://schemas.openxmlformats.org/drawingml/2006/main">
+            <a:pPr algn="ctr">
+              <a:defRPr sz="1500" b="1">
+                <a:solidFill>
+                  <a:srgbClr val="1677C8"/>
+                </a:solidFill>
+                <a:latin typeface="Microsoft YaHei"/>
+                <a:ea typeface="Microsoft YaHei"/>
+                <a:cs typeface="Microsoft YaHei"/>
+              </a:defRPr>
+            </a:pPr>
+            <a:r>
+              <a:rPr sz="1500" b="1">
+                <a:solidFill>
+                  <a:srgbClr val="1677C8"/>
+                </a:solidFill>
+                <a:latin typeface="Microsoft YaHei"/>
+                <a:ea typeface="Microsoft YaHei"/>
+                <a:cs typeface="Microsoft YaHei"/>
+              </a:rPr>
+              <a:t>355万</a:t>
+            </a:r>
+          </a:p>
+        </p:txBody>
+      </p:sp>
+      <p:sp>
+        <p:nvSpPr>
+          <p:cNvPr id="10" name="">
+            <a:extLst xmlns:a="http://schemas.openxmlformats.org/drawingml/2006/main">
+              <a:ext uri="{FF2B5EF4-FFF2-40B4-BE49-F238E27FC236}">
+                <a16:creationId xmlns:a16="http://schemas.microsoft.com/office/drawing/2014/main" id="{C1AFBBAE-7AE4-414A-A6A7-38C890D37816}"/>
+              </a:ext>
+            </a:extLst>
+          </p:cNvPr>
+          <p:cNvSpPr>
+            <a:spLocks xmlns:a="http://schemas.openxmlformats.org/drawingml/2006/main" noGrp="1"/>
+          </p:cNvSpPr>
+          <p:nvPr/>
+        </p:nvSpPr>
+        <p:spPr>
+          <a:xfrm xmlns:a="http://schemas.openxmlformats.org/drawingml/2006/main">
+            <a:off x="1510589" y="3609975"/>
+            <a:ext cx="863041" cy="342900"/>
+          </a:xfrm>
+          <a:prstGeom xmlns:a="http://schemas.openxmlformats.org/drawingml/2006/main" prst="rect">
+            <a:avLst/>
+          </a:prstGeom>
+          <a:noFill xmlns:a="http://schemas.openxmlformats.org/drawingml/2006/main"/>
+          <a:ln xmlns:a="http://schemas.openxmlformats.org/drawingml/2006/main" w="0">
+            <a:noFill/>
+            <a:prstDash val="solid"/>
+          </a:ln>
+        </p:spPr>
+        <p:txBody>
+          <a:bodyPr xmlns:a="http://schemas.openxmlformats.org/drawingml/2006/main" lIns="0" tIns="0" rIns="0" bIns="0" anchor="ctr">
+            <a:normAutofit fontScale="100000"/>
+          </a:bodyPr>
+          <a:lstStyle xmlns:a="http://schemas.openxmlformats.org/drawingml/2006/main"/>
+          <a:p xmlns:a="http://schemas.openxmlformats.org/drawingml/2006/main">
+            <a:pPr algn="ctr">
+              <a:defRPr sz="1200" b="0">
+                <a:solidFill>
+                  <a:srgbClr val="475569"/>
+                </a:solidFill>
+                <a:latin typeface="Microsoft YaHei"/>
+                <a:ea typeface="Microsoft YaHei"/>
+                <a:cs typeface="Microsoft YaHei"/>
+              </a:defRPr>
+            </a:pPr>
+            <a:r>
+              <a:rPr sz="1200" b="0">
+                <a:solidFill>
+                  <a:srgbClr val="475569"/>
+                </a:solidFill>
+                <a:latin typeface="Microsoft YaHei"/>
+                <a:ea typeface="Microsoft YaHei"/>
+                <a:cs typeface="Microsoft YaHei"/>
+              </a:rPr>
+              <a:t>阅读量</a:t>
+            </a:r>
+          </a:p>
+        </p:txBody>
+      </p:sp>
+      <p:sp>
+        <p:nvSpPr>
+          <p:cNvPr id="11" name="">
+            <a:extLst xmlns:a="http://schemas.openxmlformats.org/drawingml/2006/main">
+              <a:ext uri="{FF2B5EF4-FFF2-40B4-BE49-F238E27FC236}">
+                <a16:creationId xmlns:a16="http://schemas.microsoft.com/office/drawing/2014/main" id="{34623049-EB56-4B7C-8C2C-A6F4685F1CC3}"/>
+              </a:ext>
+            </a:extLst>
+          </p:cNvPr>
+          <p:cNvSpPr>
+            <a:spLocks xmlns:a="http://schemas.openxmlformats.org/drawingml/2006/main" noGrp="1"/>
+          </p:cNvSpPr>
+          <p:nvPr/>
+        </p:nvSpPr>
+        <p:spPr>
+          <a:xfrm xmlns:a="http://schemas.openxmlformats.org/drawingml/2006/main">
+            <a:off x="609600" y="4095750"/>
+            <a:ext cx="1859280" cy="476250"/>
+          </a:xfrm>
+          <a:prstGeom xmlns:a="http://schemas.openxmlformats.org/drawingml/2006/main" prst="roundRect">
+            <a:avLst>
+              <a:gd name="adj" fmla="val 24000"/>
+            </a:avLst>
+          </a:prstGeom>
+          <a:solidFill xmlns:a="http://schemas.openxmlformats.org/drawingml/2006/main">
+            <a:srgbClr val="FFFFFF"/>
+          </a:solidFill>
+          <a:ln xmlns:a="http://schemas.openxmlformats.org/drawingml/2006/main" w="9525">
+            <a:solidFill>
+              <a:srgbClr val="C7D8E7"/>
+            </a:solidFill>
+            <a:prstDash val="solid"/>
+          </a:ln>
+        </p:spPr>
+      </p:sp>
+      <p:sp>
+        <p:nvSpPr>
+          <p:cNvPr id="12" name="">
+            <a:extLst xmlns:a="http://schemas.openxmlformats.org/drawingml/2006/main">
+              <a:ext uri="{FF2B5EF4-FFF2-40B4-BE49-F238E27FC236}">
+                <a16:creationId xmlns:a16="http://schemas.microsoft.com/office/drawing/2014/main" id="{A572D057-0A59-4144-8CCC-D167D9BFC699}"/>
+              </a:ext>
+            </a:extLst>
+          </p:cNvPr>
+          <p:cNvSpPr>
+            <a:spLocks xmlns:a="http://schemas.openxmlformats.org/drawingml/2006/main" noGrp="1"/>
+          </p:cNvSpPr>
+          <p:nvPr/>
+        </p:nvSpPr>
+        <p:spPr>
+          <a:xfrm xmlns:a="http://schemas.openxmlformats.org/drawingml/2006/main">
+            <a:off x="704850" y="4162425"/>
+            <a:ext cx="767639" cy="342900"/>
+          </a:xfrm>
+          <a:prstGeom xmlns:a="http://schemas.openxmlformats.org/drawingml/2006/main" prst="rect">
+            <a:avLst/>
+          </a:prstGeom>
+          <a:noFill xmlns:a="http://schemas.openxmlformats.org/drawingml/2006/main"/>
+          <a:ln xmlns:a="http://schemas.openxmlformats.org/drawingml/2006/main" w="0">
+            <a:noFill/>
+            <a:prstDash val="solid"/>
+          </a:ln>
+        </p:spPr>
+        <p:txBody>
+          <a:bodyPr xmlns:a="http://schemas.openxmlformats.org/drawingml/2006/main" lIns="0" tIns="0" rIns="0" bIns="0" anchor="ctr">
+            <a:normAutofit fontScale="100000"/>
+          </a:bodyPr>
+          <a:lstStyle xmlns:a="http://schemas.openxmlformats.org/drawingml/2006/main"/>
+          <a:p xmlns:a="http://schemas.openxmlformats.org/drawingml/2006/main">
+            <a:pPr algn="ctr">
+              <a:defRPr sz="1500" b="1">
+                <a:solidFill>
+                  <a:srgbClr val="1677C8"/>
+                </a:solidFill>
+                <a:latin typeface="Microsoft YaHei"/>
+                <a:ea typeface="Microsoft YaHei"/>
+                <a:cs typeface="Microsoft YaHei"/>
+              </a:defRPr>
+            </a:pPr>
+            <a:r>
+              <a:rPr sz="1500" b="1">
+                <a:solidFill>
+                  <a:srgbClr val="1677C8"/>
+                </a:solidFill>
+                <a:latin typeface="Microsoft YaHei"/>
+                <a:ea typeface="Microsoft YaHei"/>
+                <a:cs typeface="Microsoft YaHei"/>
+              </a:rPr>
+              <a:t>+18%</a:t>
+            </a:r>
+          </a:p>
+        </p:txBody>
+      </p:sp>
+      <p:sp>
+        <p:nvSpPr>
+          <p:cNvPr id="13" name="">
+            <a:extLst xmlns:a="http://schemas.openxmlformats.org/drawingml/2006/main">
+              <a:ext uri="{FF2B5EF4-FFF2-40B4-BE49-F238E27FC236}">
+                <a16:creationId xmlns:a16="http://schemas.microsoft.com/office/drawing/2014/main" id="{2D32EA88-FACE-43B0-9BE1-DCFB8A4861D4}"/>
+              </a:ext>
+            </a:extLst>
+          </p:cNvPr>
+          <p:cNvSpPr>
+            <a:spLocks xmlns:a="http://schemas.openxmlformats.org/drawingml/2006/main" noGrp="1"/>
+          </p:cNvSpPr>
+          <p:nvPr/>
+        </p:nvSpPr>
+        <p:spPr>
+          <a:xfrm xmlns:a="http://schemas.openxmlformats.org/drawingml/2006/main">
+            <a:off x="1510589" y="4162425"/>
+            <a:ext cx="863041" cy="342900"/>
+          </a:xfrm>
+          <a:prstGeom xmlns:a="http://schemas.openxmlformats.org/drawingml/2006/main" prst="rect">
+            <a:avLst/>
+          </a:prstGeom>
+          <a:noFill xmlns:a="http://schemas.openxmlformats.org/drawingml/2006/main"/>
+          <a:ln xmlns:a="http://schemas.openxmlformats.org/drawingml/2006/main" w="0">
+            <a:noFill/>
+            <a:prstDash val="solid"/>
+          </a:ln>
+        </p:spPr>
+        <p:txBody>
+          <a:bodyPr xmlns:a="http://schemas.openxmlformats.org/drawingml/2006/main" lIns="0" tIns="0" rIns="0" bIns="0" anchor="ctr">
+            <a:normAutofit fontScale="100000"/>
+          </a:bodyPr>
+          <a:lstStyle xmlns:a="http://schemas.openxmlformats.org/drawingml/2006/main"/>
+          <a:p xmlns:a="http://schemas.openxmlformats.org/drawingml/2006/main">
+            <a:pPr algn="ctr">
+              <a:defRPr sz="1200" b="0">
+                <a:solidFill>
+                  <a:srgbClr val="475569"/>
+                </a:solidFill>
+                <a:latin typeface="Microsoft YaHei"/>
+                <a:ea typeface="Microsoft YaHei"/>
+                <a:cs typeface="Microsoft YaHei"/>
+              </a:defRPr>
+            </a:pPr>
+            <a:r>
+              <a:rPr sz="1200" b="0">
+                <a:solidFill>
+                  <a:srgbClr val="475569"/>
+                </a:solidFill>
+                <a:latin typeface="Microsoft YaHei"/>
+                <a:ea typeface="Microsoft YaHei"/>
+                <a:cs typeface="Microsoft YaHei"/>
+              </a:rPr>
+              <a:t>增长率</a:t>
+            </a:r>
+          </a:p>
+        </p:txBody>
+      </p:sp>
+      <p:sp>
+        <p:nvSpPr>
+          <p:cNvPr id="14" name="">
+            <a:extLst xmlns:a="http://schemas.openxmlformats.org/drawingml/2006/main">
+              <a:ext uri="{FF2B5EF4-FFF2-40B4-BE49-F238E27FC236}">
+                <a16:creationId xmlns:a16="http://schemas.microsoft.com/office/drawing/2014/main" id="{FAA13FE6-262D-44C3-A36A-2F06908B5A39}"/>
+              </a:ext>
+            </a:extLst>
+          </p:cNvPr>
+          <p:cNvSpPr>
+            <a:spLocks xmlns:a="http://schemas.openxmlformats.org/drawingml/2006/main" noGrp="1"/>
+          </p:cNvSpPr>
+          <p:nvPr/>
+        </p:nvSpPr>
+        <p:spPr>
+          <a:xfrm xmlns:a="http://schemas.openxmlformats.org/drawingml/2006/main">
+            <a:off x="457200" y="5200650"/>
+            <a:ext cx="2164080" cy="419100"/>
+          </a:xfrm>
+          <a:prstGeom xmlns:a="http://schemas.openxmlformats.org/drawingml/2006/main" prst="chevron">
+            <a:avLst/>
+          </a:prstGeom>
+          <a:solidFill xmlns:a="http://schemas.openxmlformats.org/drawingml/2006/main">
+            <a:srgbClr val="567AB8"/>
+          </a:solidFill>
+          <a:ln xmlns:a="http://schemas.openxmlformats.org/drawingml/2006/main" w="9525">
+            <a:solidFill>
+              <a:srgbClr val="FFFFFF"/>
+            </a:solidFill>
+            <a:prstDash val="solid"/>
+          </a:ln>
+        </p:spPr>
+        <p:txBody>
+          <a:bodyPr xmlns:a="http://schemas.openxmlformats.org/drawingml/2006/main" lIns="95250" tIns="19050" rIns="133350" bIns="19050" anchor="ctr">
+            <a:normAutofit fontScale="100000"/>
+          </a:bodyPr>
+          <a:lstStyle xmlns:a="http://schemas.openxmlformats.org/drawingml/2006/main"/>
+          <a:p xmlns:a="http://schemas.openxmlformats.org/drawingml/2006/main">
+            <a:pPr algn="ctr">
+              <a:defRPr sz="1200" b="1">
+                <a:solidFill>
+                  <a:srgbClr val="FFFFFF"/>
+                </a:solidFill>
+                <a:latin typeface="Microsoft YaHei"/>
+                <a:ea typeface="Microsoft YaHei"/>
+                <a:cs typeface="Microsoft YaHei"/>
+              </a:defRPr>
+            </a:pPr>
+            <a:r>
+              <a:rPr sz="1200" b="1">
+                <a:solidFill>
+                  <a:srgbClr val="FFFFFF"/>
+                </a:solidFill>
+                <a:latin typeface="Microsoft YaHei"/>
+                <a:ea typeface="Microsoft YaHei"/>
+                <a:cs typeface="Microsoft YaHei"/>
+              </a:rPr>
+              <a:t>扩大品牌影响</a:t>
+            </a:r>
+          </a:p>
+        </p:txBody>
+      </p:sp>
+      <p:sp>
+        <p:nvSpPr>
+          <p:cNvPr id="15" name="PPAGENT_CONNECTOR|from=goal-kpi-goal|fromSide=bottom|to=goal-kpi-column-1|toSide=top">
+            <a:extLst xmlns:a="http://schemas.openxmlformats.org/drawingml/2006/main">
+              <a:ext uri="{FF2B5EF4-FFF2-40B4-BE49-F238E27FC236}">
+                <a16:creationId xmlns:a16="http://schemas.microsoft.com/office/drawing/2014/main" id="{F936D0A5-41CC-474F-9D5A-58E7037078A1}"/>
+              </a:ext>
+            </a:extLst>
+          </p:cNvPr>
+          <p:cNvSpPr>
+            <a:spLocks xmlns:a="http://schemas.openxmlformats.org/drawingml/2006/main" noGrp="1"/>
+          </p:cNvSpPr>
+          <p:nvPr/>
+        </p:nvSpPr>
+        <p:spPr>
+          <a:xfrm xmlns:a="http://schemas.openxmlformats.org/drawingml/2006/main" flipH="1" flipV="0">
+            <a:off x="3817620" y="1847850"/>
+            <a:ext cx="2278380" cy="342900"/>
+          </a:xfrm>
+          <a:prstGeom xmlns:a="http://schemas.openxmlformats.org/drawingml/2006/main" prst="line">
+            <a:avLst/>
+          </a:prstGeom>
+          <a:noFill xmlns:a="http://schemas.openxmlformats.org/drawingml/2006/main"/>
           <a:ln xmlns:a="http://schemas.openxmlformats.org/drawingml/2006/main" w="19050">
             <a:solidFill>
-              <a:srgbClr val="1677C8"/>
+              <a:srgbClr val="6483BB"/>
+            </a:solidFill>
+            <a:prstDash val="solid"/>
+          </a:ln>
+        </p:spPr>
+      </p:sp>
+      <p:sp>
+        <p:nvSpPr>
+          <p:cNvPr id="16" name="PPAGENT_QA|parent=goal-kpi-column-1|domains=goal-kpi-columns">
+            <a:extLst xmlns:a="http://schemas.openxmlformats.org/drawingml/2006/main">
+              <a:ext uri="{FF2B5EF4-FFF2-40B4-BE49-F238E27FC236}">
+                <a16:creationId xmlns:a16="http://schemas.microsoft.com/office/drawing/2014/main" id="{58D119D5-41ED-4AFC-98D7-3E538A36D979}"/>
+              </a:ext>
+            </a:extLst>
+          </p:cNvPr>
+          <p:cNvSpPr>
+            <a:spLocks xmlns:a="http://schemas.openxmlformats.org/drawingml/2006/main" noGrp="1"/>
+          </p:cNvSpPr>
+          <p:nvPr/>
+        </p:nvSpPr>
+        <p:spPr>
+          <a:xfrm xmlns:a="http://schemas.openxmlformats.org/drawingml/2006/main">
+            <a:off x="2735580" y="2190750"/>
+            <a:ext cx="2164080" cy="3429000"/>
+          </a:xfrm>
+          <a:prstGeom xmlns:a="http://schemas.openxmlformats.org/drawingml/2006/main" prst="roundRect">
+            <a:avLst>
+              <a:gd name="adj" fmla="val 5282"/>
+            </a:avLst>
+          </a:prstGeom>
+          <a:solidFill xmlns:a="http://schemas.openxmlformats.org/drawingml/2006/main">
+            <a:srgbClr val="F1F5F9"/>
+          </a:solidFill>
+          <a:ln xmlns:a="http://schemas.openxmlformats.org/drawingml/2006/main" w="9525">
+            <a:solidFill>
+              <a:srgbClr val="D8E3ED"/>
             </a:solidFill>
             <a:prstDash val="solid"/>
           </a:ln>
@@ -1547,16 +1886,49 @@
           <a:effectRef xmlns:a="http://schemas.openxmlformats.org/drawingml/2006/main" idx="4"/>
           <a:fontRef xmlns:a="http://schemas.openxmlformats.org/drawingml/2006/main" idx="major"/>
         </p:style>
+      </p:sp>
+      <p:sp>
+        <p:nvSpPr>
+          <p:cNvPr id="17" name="">
+            <a:extLst xmlns:a="http://schemas.openxmlformats.org/drawingml/2006/main">
+              <a:ext uri="{FF2B5EF4-FFF2-40B4-BE49-F238E27FC236}">
+                <a16:creationId xmlns:a16="http://schemas.microsoft.com/office/drawing/2014/main" id="{F3919C0A-EC1C-46E9-A059-F4F593B928AA}"/>
+              </a:ext>
+            </a:extLst>
+          </p:cNvPr>
+          <p:cNvSpPr>
+            <a:spLocks xmlns:a="http://schemas.openxmlformats.org/drawingml/2006/main" noGrp="1"/>
+          </p:cNvSpPr>
+          <p:nvPr/>
+        </p:nvSpPr>
+        <p:spPr>
+          <a:xfrm xmlns:a="http://schemas.openxmlformats.org/drawingml/2006/main">
+            <a:off x="2735580" y="2190750"/>
+            <a:ext cx="2164080" cy="495300"/>
+          </a:xfrm>
+          <a:prstGeom xmlns:a="http://schemas.openxmlformats.org/drawingml/2006/main" prst="roundRect">
+            <a:avLst>
+              <a:gd name="adj" fmla="val 23077"/>
+            </a:avLst>
+          </a:prstGeom>
+          <a:solidFill xmlns:a="http://schemas.openxmlformats.org/drawingml/2006/main">
+            <a:srgbClr val="567AB8"/>
+          </a:solidFill>
+          <a:ln xmlns:a="http://schemas.openxmlformats.org/drawingml/2006/main" w="0">
+            <a:noFill/>
+            <a:prstDash val="solid"/>
+          </a:ln>
+        </p:spPr>
         <p:txBody>
           <a:bodyPr xmlns:a="http://schemas.openxmlformats.org/drawingml/2006/main" lIns="114300" tIns="76200" rIns="114300" bIns="76200" anchor="ctr">
-            <a:normAutofit fontScale="97573"/>
+            <a:normAutofit fontScale="100000"/>
           </a:bodyPr>
           <a:lstStyle xmlns:a="http://schemas.openxmlformats.org/drawingml/2006/main"/>
           <a:p xmlns:a="http://schemas.openxmlformats.org/drawingml/2006/main">
             <a:pPr algn="ctr">
-              <a:defRPr sz="1275" b="1">
-                <a:solidFill>
-                  <a:srgbClr val="1677C8"/>
+              <a:defRPr sz="1350" b="1">
+                <a:solidFill>
+                  <a:srgbClr val="FFFFFF"/>
                 </a:solidFill>
                 <a:latin typeface="Microsoft YaHei"/>
                 <a:ea typeface="Microsoft YaHei"/>
@@ -1564,22 +1936,80 @@
               </a:defRPr>
             </a:pPr>
             <a:r>
-              <a:rPr sz="1275" b="1">
-                <a:solidFill>
-                  <a:srgbClr val="1677C8"/>
+              <a:rPr sz="1350" b="1">
+                <a:solidFill>
+                  <a:srgbClr val="FFFFFF"/>
                 </a:solidFill>
                 <a:latin typeface="Microsoft YaHei"/>
                 <a:ea typeface="Microsoft YaHei"/>
                 <a:cs typeface="Microsoft YaHei"/>
               </a:rPr>
-              <a:t>20%</a:t>
+              <a:t>电商运营</a:t>
+            </a:r>
+          </a:p>
+        </p:txBody>
+      </p:sp>
+      <p:sp>
+        <p:nvSpPr>
+          <p:cNvPr id="18" name="">
+            <a:extLst xmlns:a="http://schemas.openxmlformats.org/drawingml/2006/main">
+              <a:ext uri="{FF2B5EF4-FFF2-40B4-BE49-F238E27FC236}">
+                <a16:creationId xmlns:a16="http://schemas.microsoft.com/office/drawing/2014/main" id="{99B28ADE-FF67-42C3-A829-77CA9F8AC12E}"/>
+              </a:ext>
+            </a:extLst>
+          </p:cNvPr>
+          <p:cNvSpPr>
+            <a:spLocks xmlns:a="http://schemas.openxmlformats.org/drawingml/2006/main" noGrp="1"/>
+          </p:cNvSpPr>
+          <p:nvPr/>
+        </p:nvSpPr>
+        <p:spPr>
+          <a:xfrm xmlns:a="http://schemas.openxmlformats.org/drawingml/2006/main">
+            <a:off x="2887980" y="2819400"/>
+            <a:ext cx="1859280" cy="590550"/>
+          </a:xfrm>
+          <a:prstGeom xmlns:a="http://schemas.openxmlformats.org/drawingml/2006/main" prst="rect">
+            <a:avLst/>
+          </a:prstGeom>
+          <a:noFill xmlns:a="http://schemas.openxmlformats.org/drawingml/2006/main"/>
+          <a:ln xmlns:a="http://schemas.openxmlformats.org/drawingml/2006/main" w="0">
+            <a:noFill/>
+            <a:prstDash val="solid"/>
+          </a:ln>
+        </p:spPr>
+        <p:txBody>
+          <a:bodyPr xmlns:a="http://schemas.openxmlformats.org/drawingml/2006/main" lIns="0" tIns="0" rIns="0" bIns="0" anchor="t">
+            <a:normAutofit fontScale="100000"/>
+          </a:bodyPr>
+          <a:lstStyle xmlns:a="http://schemas.openxmlformats.org/drawingml/2006/main"/>
+          <a:p xmlns:a="http://schemas.openxmlformats.org/drawingml/2006/main">
+            <a:pPr algn="ctr">
+              <a:defRPr sz="1200" b="0">
+                <a:solidFill>
+                  <a:srgbClr val="475569"/>
+                </a:solidFill>
+                <a:latin typeface="Microsoft YaHei"/>
+                <a:ea typeface="Microsoft YaHei"/>
+                <a:cs typeface="Microsoft YaHei"/>
+              </a:defRPr>
+            </a:pPr>
+            <a:r>
+              <a:rPr sz="1200" b="0">
+                <a:solidFill>
+                  <a:srgbClr val="475569"/>
+                </a:solidFill>
+                <a:latin typeface="Microsoft YaHei"/>
+                <a:ea typeface="Microsoft YaHei"/>
+                <a:cs typeface="Microsoft YaHei"/>
+              </a:rPr>
+              <a:t>改善交易转化</a:t>
             </a:r>
           </a:p>
           <a:p xmlns:a="http://schemas.openxmlformats.org/drawingml/2006/main">
             <a:pPr algn="ctr">
-              <a:defRPr sz="1275" b="1">
-                <a:solidFill>
-                  <a:srgbClr val="1677C8"/>
+              <a:defRPr sz="1200" b="0">
+                <a:solidFill>
+                  <a:srgbClr val="475569"/>
                 </a:solidFill>
                 <a:latin typeface="Microsoft YaHei"/>
                 <a:ea typeface="Microsoft YaHei"/>
@@ -1587,47 +2017,444 @@
               </a:defRPr>
             </a:pPr>
             <a:r>
-              <a:rPr sz="1275" b="1">
-                <a:solidFill>
-                  <a:srgbClr val="1677C8"/>
+              <a:rPr sz="1200" b="0">
+                <a:solidFill>
+                  <a:srgbClr val="475569"/>
                 </a:solidFill>
                 <a:latin typeface="Microsoft YaHei"/>
                 <a:ea typeface="Microsoft YaHei"/>
                 <a:cs typeface="Microsoft YaHei"/>
               </a:rPr>
-              <a:t>指标 B</a:t>
+              <a:t>与重点品类收益</a:t>
             </a:r>
           </a:p>
         </p:txBody>
       </p:sp>
       <p:sp>
         <p:nvSpPr>
-          <p:cNvPr id="9" name="">
-            <a:extLst xmlns:a="http://schemas.openxmlformats.org/drawingml/2006/main">
-              <a:ext uri="{FF2B5EF4-FFF2-40B4-BE49-F238E27FC236}">
-                <a16:creationId xmlns:a16="http://schemas.microsoft.com/office/drawing/2014/main" id="{E89F3CC4-8C2D-4273-A282-9AD32C484D06}"/>
-              </a:ext>
-            </a:extLst>
-          </p:cNvPr>
-          <p:cNvSpPr>
-            <a:spLocks xmlns:a="http://schemas.openxmlformats.org/drawingml/2006/main" noGrp="1"/>
-          </p:cNvSpPr>
-          <p:nvPr/>
-        </p:nvSpPr>
-        <p:spPr>
-          <a:xfrm xmlns:a="http://schemas.openxmlformats.org/drawingml/2006/main">
-            <a:off x="2333625" y="3295650"/>
-            <a:ext cx="723900" cy="723900"/>
-          </a:xfrm>
-          <a:prstGeom xmlns:a="http://schemas.openxmlformats.org/drawingml/2006/main" prst="ellipse">
+          <p:cNvPr id="19" name="">
+            <a:extLst xmlns:a="http://schemas.openxmlformats.org/drawingml/2006/main">
+              <a:ext uri="{FF2B5EF4-FFF2-40B4-BE49-F238E27FC236}">
+                <a16:creationId xmlns:a16="http://schemas.microsoft.com/office/drawing/2014/main" id="{DF66101C-7575-40D7-9646-4DF107C35EFA}"/>
+              </a:ext>
+            </a:extLst>
+          </p:cNvPr>
+          <p:cNvSpPr>
+            <a:spLocks xmlns:a="http://schemas.openxmlformats.org/drawingml/2006/main" noGrp="1"/>
+          </p:cNvSpPr>
+          <p:nvPr/>
+        </p:nvSpPr>
+        <p:spPr>
+          <a:xfrm xmlns:a="http://schemas.openxmlformats.org/drawingml/2006/main">
+            <a:off x="2887980" y="3543300"/>
+            <a:ext cx="1859280" cy="476250"/>
+          </a:xfrm>
+          <a:prstGeom xmlns:a="http://schemas.openxmlformats.org/drawingml/2006/main" prst="roundRect">
+            <a:avLst>
+              <a:gd name="adj" fmla="val 24000"/>
+            </a:avLst>
+          </a:prstGeom>
+          <a:solidFill xmlns:a="http://schemas.openxmlformats.org/drawingml/2006/main">
+            <a:srgbClr val="FFFFFF"/>
+          </a:solidFill>
+          <a:ln xmlns:a="http://schemas.openxmlformats.org/drawingml/2006/main" w="9525">
+            <a:solidFill>
+              <a:srgbClr val="C7D8E7"/>
+            </a:solidFill>
+            <a:prstDash val="solid"/>
+          </a:ln>
+        </p:spPr>
+      </p:sp>
+      <p:sp>
+        <p:nvSpPr>
+          <p:cNvPr id="20" name="">
+            <a:extLst xmlns:a="http://schemas.openxmlformats.org/drawingml/2006/main">
+              <a:ext uri="{FF2B5EF4-FFF2-40B4-BE49-F238E27FC236}">
+                <a16:creationId xmlns:a16="http://schemas.microsoft.com/office/drawing/2014/main" id="{5A8F4C20-2729-4667-9BA5-6C1EB4D0DA86}"/>
+              </a:ext>
+            </a:extLst>
+          </p:cNvPr>
+          <p:cNvSpPr>
+            <a:spLocks xmlns:a="http://schemas.openxmlformats.org/drawingml/2006/main" noGrp="1"/>
+          </p:cNvSpPr>
+          <p:nvPr/>
+        </p:nvSpPr>
+        <p:spPr>
+          <a:xfrm xmlns:a="http://schemas.openxmlformats.org/drawingml/2006/main">
+            <a:off x="2983230" y="3609975"/>
+            <a:ext cx="767639" cy="342900"/>
+          </a:xfrm>
+          <a:prstGeom xmlns:a="http://schemas.openxmlformats.org/drawingml/2006/main" prst="rect">
             <a:avLst/>
           </a:prstGeom>
+          <a:noFill xmlns:a="http://schemas.openxmlformats.org/drawingml/2006/main"/>
+          <a:ln xmlns:a="http://schemas.openxmlformats.org/drawingml/2006/main" w="0">
+            <a:noFill/>
+            <a:prstDash val="solid"/>
+          </a:ln>
+        </p:spPr>
+        <p:txBody>
+          <a:bodyPr xmlns:a="http://schemas.openxmlformats.org/drawingml/2006/main" lIns="0" tIns="0" rIns="0" bIns="0" anchor="ctr">
+            <a:normAutofit fontScale="100000"/>
+          </a:bodyPr>
+          <a:lstStyle xmlns:a="http://schemas.openxmlformats.org/drawingml/2006/main"/>
+          <a:p xmlns:a="http://schemas.openxmlformats.org/drawingml/2006/main">
+            <a:pPr algn="ctr">
+              <a:defRPr sz="1500" b="1">
+                <a:solidFill>
+                  <a:srgbClr val="1677C8"/>
+                </a:solidFill>
+                <a:latin typeface="Microsoft YaHei"/>
+                <a:ea typeface="Microsoft YaHei"/>
+                <a:cs typeface="Microsoft YaHei"/>
+              </a:defRPr>
+            </a:pPr>
+            <a:r>
+              <a:rPr sz="1500" b="1">
+                <a:solidFill>
+                  <a:srgbClr val="1677C8"/>
+                </a:solidFill>
+                <a:latin typeface="Microsoft YaHei"/>
+                <a:ea typeface="Microsoft YaHei"/>
+                <a:cs typeface="Microsoft YaHei"/>
+              </a:rPr>
+              <a:t>963万</a:t>
+            </a:r>
+          </a:p>
+        </p:txBody>
+      </p:sp>
+      <p:sp>
+        <p:nvSpPr>
+          <p:cNvPr id="21" name="">
+            <a:extLst xmlns:a="http://schemas.openxmlformats.org/drawingml/2006/main">
+              <a:ext uri="{FF2B5EF4-FFF2-40B4-BE49-F238E27FC236}">
+                <a16:creationId xmlns:a16="http://schemas.microsoft.com/office/drawing/2014/main" id="{E1EDF5C1-0E80-4FDF-91A5-2A9DF5981F34}"/>
+              </a:ext>
+            </a:extLst>
+          </p:cNvPr>
+          <p:cNvSpPr>
+            <a:spLocks xmlns:a="http://schemas.openxmlformats.org/drawingml/2006/main" noGrp="1"/>
+          </p:cNvSpPr>
+          <p:nvPr/>
+        </p:nvSpPr>
+        <p:spPr>
+          <a:xfrm xmlns:a="http://schemas.openxmlformats.org/drawingml/2006/main">
+            <a:off x="3788969" y="3609975"/>
+            <a:ext cx="863041" cy="342900"/>
+          </a:xfrm>
+          <a:prstGeom xmlns:a="http://schemas.openxmlformats.org/drawingml/2006/main" prst="rect">
+            <a:avLst/>
+          </a:prstGeom>
+          <a:noFill xmlns:a="http://schemas.openxmlformats.org/drawingml/2006/main"/>
+          <a:ln xmlns:a="http://schemas.openxmlformats.org/drawingml/2006/main" w="0">
+            <a:noFill/>
+            <a:prstDash val="solid"/>
+          </a:ln>
+        </p:spPr>
+        <p:txBody>
+          <a:bodyPr xmlns:a="http://schemas.openxmlformats.org/drawingml/2006/main" lIns="0" tIns="0" rIns="0" bIns="0" anchor="ctr">
+            <a:normAutofit fontScale="100000"/>
+          </a:bodyPr>
+          <a:lstStyle xmlns:a="http://schemas.openxmlformats.org/drawingml/2006/main"/>
+          <a:p xmlns:a="http://schemas.openxmlformats.org/drawingml/2006/main">
+            <a:pPr algn="ctr">
+              <a:defRPr sz="1200" b="0">
+                <a:solidFill>
+                  <a:srgbClr val="475569"/>
+                </a:solidFill>
+                <a:latin typeface="Microsoft YaHei"/>
+                <a:ea typeface="Microsoft YaHei"/>
+                <a:cs typeface="Microsoft YaHei"/>
+              </a:defRPr>
+            </a:pPr>
+            <a:r>
+              <a:rPr sz="1200" b="0">
+                <a:solidFill>
+                  <a:srgbClr val="475569"/>
+                </a:solidFill>
+                <a:latin typeface="Microsoft YaHei"/>
+                <a:ea typeface="Microsoft YaHei"/>
+                <a:cs typeface="Microsoft YaHei"/>
+              </a:rPr>
+              <a:t>销售额</a:t>
+            </a:r>
+          </a:p>
+        </p:txBody>
+      </p:sp>
+      <p:sp>
+        <p:nvSpPr>
+          <p:cNvPr id="22" name="">
+            <a:extLst xmlns:a="http://schemas.openxmlformats.org/drawingml/2006/main">
+              <a:ext uri="{FF2B5EF4-FFF2-40B4-BE49-F238E27FC236}">
+                <a16:creationId xmlns:a16="http://schemas.microsoft.com/office/drawing/2014/main" id="{6A74EB28-2F3A-4888-B83A-FC51045392FF}"/>
+              </a:ext>
+            </a:extLst>
+          </p:cNvPr>
+          <p:cNvSpPr>
+            <a:spLocks xmlns:a="http://schemas.openxmlformats.org/drawingml/2006/main" noGrp="1"/>
+          </p:cNvSpPr>
+          <p:nvPr/>
+        </p:nvSpPr>
+        <p:spPr>
+          <a:xfrm xmlns:a="http://schemas.openxmlformats.org/drawingml/2006/main">
+            <a:off x="2887980" y="4095750"/>
+            <a:ext cx="1859280" cy="476250"/>
+          </a:xfrm>
+          <a:prstGeom xmlns:a="http://schemas.openxmlformats.org/drawingml/2006/main" prst="roundRect">
+            <a:avLst>
+              <a:gd name="adj" fmla="val 24000"/>
+            </a:avLst>
+          </a:prstGeom>
           <a:solidFill xmlns:a="http://schemas.openxmlformats.org/drawingml/2006/main">
-            <a:srgbClr val="00A8D8"/>
-          </a:solidFill>
+            <a:srgbClr val="FFFFFF"/>
+          </a:solidFill>
+          <a:ln xmlns:a="http://schemas.openxmlformats.org/drawingml/2006/main" w="9525">
+            <a:solidFill>
+              <a:srgbClr val="C7D8E7"/>
+            </a:solidFill>
+            <a:prstDash val="solid"/>
+          </a:ln>
+        </p:spPr>
+      </p:sp>
+      <p:sp>
+        <p:nvSpPr>
+          <p:cNvPr id="23" name="">
+            <a:extLst xmlns:a="http://schemas.openxmlformats.org/drawingml/2006/main">
+              <a:ext uri="{FF2B5EF4-FFF2-40B4-BE49-F238E27FC236}">
+                <a16:creationId xmlns:a16="http://schemas.microsoft.com/office/drawing/2014/main" id="{6D13BD79-D82F-4A83-820C-65D564EA7B1A}"/>
+              </a:ext>
+            </a:extLst>
+          </p:cNvPr>
+          <p:cNvSpPr>
+            <a:spLocks xmlns:a="http://schemas.openxmlformats.org/drawingml/2006/main" noGrp="1"/>
+          </p:cNvSpPr>
+          <p:nvPr/>
+        </p:nvSpPr>
+        <p:spPr>
+          <a:xfrm xmlns:a="http://schemas.openxmlformats.org/drawingml/2006/main">
+            <a:off x="2983230" y="4162425"/>
+            <a:ext cx="767639" cy="342900"/>
+          </a:xfrm>
+          <a:prstGeom xmlns:a="http://schemas.openxmlformats.org/drawingml/2006/main" prst="rect">
+            <a:avLst/>
+          </a:prstGeom>
+          <a:noFill xmlns:a="http://schemas.openxmlformats.org/drawingml/2006/main"/>
+          <a:ln xmlns:a="http://schemas.openxmlformats.org/drawingml/2006/main" w="0">
+            <a:noFill/>
+            <a:prstDash val="solid"/>
+          </a:ln>
+        </p:spPr>
+        <p:txBody>
+          <a:bodyPr xmlns:a="http://schemas.openxmlformats.org/drawingml/2006/main" lIns="0" tIns="0" rIns="0" bIns="0" anchor="ctr">
+            <a:normAutofit fontScale="100000"/>
+          </a:bodyPr>
+          <a:lstStyle xmlns:a="http://schemas.openxmlformats.org/drawingml/2006/main"/>
+          <a:p xmlns:a="http://schemas.openxmlformats.org/drawingml/2006/main">
+            <a:pPr algn="ctr">
+              <a:defRPr sz="1500" b="1">
+                <a:solidFill>
+                  <a:srgbClr val="1677C8"/>
+                </a:solidFill>
+                <a:latin typeface="Microsoft YaHei"/>
+                <a:ea typeface="Microsoft YaHei"/>
+                <a:cs typeface="Microsoft YaHei"/>
+              </a:defRPr>
+            </a:pPr>
+            <a:r>
+              <a:rPr sz="1500" b="1">
+                <a:solidFill>
+                  <a:srgbClr val="1677C8"/>
+                </a:solidFill>
+                <a:latin typeface="Microsoft YaHei"/>
+                <a:ea typeface="Microsoft YaHei"/>
+                <a:cs typeface="Microsoft YaHei"/>
+              </a:rPr>
+              <a:t>6.2%</a:t>
+            </a:r>
+          </a:p>
+        </p:txBody>
+      </p:sp>
+      <p:sp>
+        <p:nvSpPr>
+          <p:cNvPr id="24" name="">
+            <a:extLst xmlns:a="http://schemas.openxmlformats.org/drawingml/2006/main">
+              <a:ext uri="{FF2B5EF4-FFF2-40B4-BE49-F238E27FC236}">
+                <a16:creationId xmlns:a16="http://schemas.microsoft.com/office/drawing/2014/main" id="{E4F62988-F3B1-4D44-8A80-AC0A36880098}"/>
+              </a:ext>
+            </a:extLst>
+          </p:cNvPr>
+          <p:cNvSpPr>
+            <a:spLocks xmlns:a="http://schemas.openxmlformats.org/drawingml/2006/main" noGrp="1"/>
+          </p:cNvSpPr>
+          <p:nvPr/>
+        </p:nvSpPr>
+        <p:spPr>
+          <a:xfrm xmlns:a="http://schemas.openxmlformats.org/drawingml/2006/main">
+            <a:off x="3788969" y="4162425"/>
+            <a:ext cx="863041" cy="342900"/>
+          </a:xfrm>
+          <a:prstGeom xmlns:a="http://schemas.openxmlformats.org/drawingml/2006/main" prst="rect">
+            <a:avLst/>
+          </a:prstGeom>
+          <a:noFill xmlns:a="http://schemas.openxmlformats.org/drawingml/2006/main"/>
+          <a:ln xmlns:a="http://schemas.openxmlformats.org/drawingml/2006/main" w="0">
+            <a:noFill/>
+            <a:prstDash val="solid"/>
+          </a:ln>
+        </p:spPr>
+        <p:txBody>
+          <a:bodyPr xmlns:a="http://schemas.openxmlformats.org/drawingml/2006/main" lIns="0" tIns="0" rIns="0" bIns="0" anchor="ctr">
+            <a:normAutofit fontScale="100000"/>
+          </a:bodyPr>
+          <a:lstStyle xmlns:a="http://schemas.openxmlformats.org/drawingml/2006/main"/>
+          <a:p xmlns:a="http://schemas.openxmlformats.org/drawingml/2006/main">
+            <a:pPr algn="ctr">
+              <a:defRPr sz="1200" b="0">
+                <a:solidFill>
+                  <a:srgbClr val="475569"/>
+                </a:solidFill>
+                <a:latin typeface="Microsoft YaHei"/>
+                <a:ea typeface="Microsoft YaHei"/>
+                <a:cs typeface="Microsoft YaHei"/>
+              </a:defRPr>
+            </a:pPr>
+            <a:r>
+              <a:rPr sz="1200" b="0">
+                <a:solidFill>
+                  <a:srgbClr val="475569"/>
+                </a:solidFill>
+                <a:latin typeface="Microsoft YaHei"/>
+                <a:ea typeface="Microsoft YaHei"/>
+                <a:cs typeface="Microsoft YaHei"/>
+              </a:rPr>
+              <a:t>转化率</a:t>
+            </a:r>
+          </a:p>
+        </p:txBody>
+      </p:sp>
+      <p:sp>
+        <p:nvSpPr>
+          <p:cNvPr id="25" name="">
+            <a:extLst xmlns:a="http://schemas.openxmlformats.org/drawingml/2006/main">
+              <a:ext uri="{FF2B5EF4-FFF2-40B4-BE49-F238E27FC236}">
+                <a16:creationId xmlns:a16="http://schemas.microsoft.com/office/drawing/2014/main" id="{5E523356-F459-4A75-A566-26F612EC0E2F}"/>
+              </a:ext>
+            </a:extLst>
+          </p:cNvPr>
+          <p:cNvSpPr>
+            <a:spLocks xmlns:a="http://schemas.openxmlformats.org/drawingml/2006/main" noGrp="1"/>
+          </p:cNvSpPr>
+          <p:nvPr/>
+        </p:nvSpPr>
+        <p:spPr>
+          <a:xfrm xmlns:a="http://schemas.openxmlformats.org/drawingml/2006/main">
+            <a:off x="2735580" y="5200650"/>
+            <a:ext cx="2164080" cy="419100"/>
+          </a:xfrm>
+          <a:prstGeom xmlns:a="http://schemas.openxmlformats.org/drawingml/2006/main" prst="chevron">
+            <a:avLst/>
+          </a:prstGeom>
+          <a:solidFill xmlns:a="http://schemas.openxmlformats.org/drawingml/2006/main">
+            <a:srgbClr val="567AB8"/>
+          </a:solidFill>
+          <a:ln xmlns:a="http://schemas.openxmlformats.org/drawingml/2006/main" w="9525">
+            <a:solidFill>
+              <a:srgbClr val="FFFFFF"/>
+            </a:solidFill>
+            <a:prstDash val="solid"/>
+          </a:ln>
+        </p:spPr>
+        <p:txBody>
+          <a:bodyPr xmlns:a="http://schemas.openxmlformats.org/drawingml/2006/main" lIns="95250" tIns="19050" rIns="133350" bIns="19050" anchor="ctr">
+            <a:normAutofit fontScale="100000"/>
+          </a:bodyPr>
+          <a:lstStyle xmlns:a="http://schemas.openxmlformats.org/drawingml/2006/main"/>
+          <a:p xmlns:a="http://schemas.openxmlformats.org/drawingml/2006/main">
+            <a:pPr algn="ctr">
+              <a:defRPr sz="1200" b="1">
+                <a:solidFill>
+                  <a:srgbClr val="FFFFFF"/>
+                </a:solidFill>
+                <a:latin typeface="Microsoft YaHei"/>
+                <a:ea typeface="Microsoft YaHei"/>
+                <a:cs typeface="Microsoft YaHei"/>
+              </a:defRPr>
+            </a:pPr>
+            <a:r>
+              <a:rPr sz="1200" b="1">
+                <a:solidFill>
+                  <a:srgbClr val="FFFFFF"/>
+                </a:solidFill>
+                <a:latin typeface="Microsoft YaHei"/>
+                <a:ea typeface="Microsoft YaHei"/>
+                <a:cs typeface="Microsoft YaHei"/>
+              </a:rPr>
+              <a:t>提升经营收益</a:t>
+            </a:r>
+          </a:p>
+        </p:txBody>
+      </p:sp>
+      <p:sp>
+        <p:nvSpPr>
+          <p:cNvPr id="26" name="PPAGENT_CONNECTOR|from=goal-kpi-goal|fromSide=bottom|to=goal-kpi-column-2|toSide=top">
+            <a:extLst xmlns:a="http://schemas.openxmlformats.org/drawingml/2006/main">
+              <a:ext uri="{FF2B5EF4-FFF2-40B4-BE49-F238E27FC236}">
+                <a16:creationId xmlns:a16="http://schemas.microsoft.com/office/drawing/2014/main" id="{D283DD50-C0FD-45CB-A00C-E5DF37B5160A}"/>
+              </a:ext>
+            </a:extLst>
+          </p:cNvPr>
+          <p:cNvSpPr>
+            <a:spLocks xmlns:a="http://schemas.openxmlformats.org/drawingml/2006/main" noGrp="1"/>
+          </p:cNvSpPr>
+          <p:nvPr/>
+        </p:nvSpPr>
+        <p:spPr>
+          <a:xfrm xmlns:a="http://schemas.openxmlformats.org/drawingml/2006/main" flipH="0" flipV="0">
+            <a:off x="6096000" y="1847850"/>
+            <a:ext cx="0" cy="342900"/>
+          </a:xfrm>
+          <a:prstGeom xmlns:a="http://schemas.openxmlformats.org/drawingml/2006/main" prst="line">
+            <a:avLst/>
+          </a:prstGeom>
+          <a:noFill xmlns:a="http://schemas.openxmlformats.org/drawingml/2006/main"/>
           <a:ln xmlns:a="http://schemas.openxmlformats.org/drawingml/2006/main" w="19050">
             <a:solidFill>
-              <a:srgbClr val="FFFFFF"/>
+              <a:srgbClr val="6483BB"/>
+            </a:solidFill>
+            <a:prstDash val="solid"/>
+          </a:ln>
+        </p:spPr>
+      </p:sp>
+      <p:sp>
+        <p:nvSpPr>
+          <p:cNvPr id="27" name="PPAGENT_QA|parent=goal-kpi-column-2|domains=goal-kpi-columns">
+            <a:extLst xmlns:a="http://schemas.openxmlformats.org/drawingml/2006/main">
+              <a:ext uri="{FF2B5EF4-FFF2-40B4-BE49-F238E27FC236}">
+                <a16:creationId xmlns:a16="http://schemas.microsoft.com/office/drawing/2014/main" id="{00FBA6EB-4459-42A9-B78E-302DF39CD741}"/>
+              </a:ext>
+            </a:extLst>
+          </p:cNvPr>
+          <p:cNvSpPr>
+            <a:spLocks xmlns:a="http://schemas.openxmlformats.org/drawingml/2006/main" noGrp="1"/>
+          </p:cNvSpPr>
+          <p:nvPr/>
+        </p:nvSpPr>
+        <p:spPr>
+          <a:xfrm xmlns:a="http://schemas.openxmlformats.org/drawingml/2006/main">
+            <a:off x="5013960" y="2190750"/>
+            <a:ext cx="2164080" cy="3429000"/>
+          </a:xfrm>
+          <a:prstGeom xmlns:a="http://schemas.openxmlformats.org/drawingml/2006/main" prst="roundRect">
+            <a:avLst>
+              <a:gd name="adj" fmla="val 5282"/>
+            </a:avLst>
+          </a:prstGeom>
+          <a:solidFill xmlns:a="http://schemas.openxmlformats.org/drawingml/2006/main">
+            <a:srgbClr val="F7FAFC"/>
+          </a:solidFill>
+          <a:ln xmlns:a="http://schemas.openxmlformats.org/drawingml/2006/main" w="9525">
+            <a:solidFill>
+              <a:srgbClr val="D8E3ED"/>
             </a:solidFill>
             <a:prstDash val="solid"/>
           </a:ln>
@@ -1638,6 +2465,39 @@
           <a:effectRef xmlns:a="http://schemas.openxmlformats.org/drawingml/2006/main" idx="4"/>
           <a:fontRef xmlns:a="http://schemas.openxmlformats.org/drawingml/2006/main" idx="major"/>
         </p:style>
+      </p:sp>
+      <p:sp>
+        <p:nvSpPr>
+          <p:cNvPr id="28" name="">
+            <a:extLst xmlns:a="http://schemas.openxmlformats.org/drawingml/2006/main">
+              <a:ext uri="{FF2B5EF4-FFF2-40B4-BE49-F238E27FC236}">
+                <a16:creationId xmlns:a16="http://schemas.microsoft.com/office/drawing/2014/main" id="{71EA7A32-988F-465C-9026-63524A4D5D47}"/>
+              </a:ext>
+            </a:extLst>
+          </p:cNvPr>
+          <p:cNvSpPr>
+            <a:spLocks xmlns:a="http://schemas.openxmlformats.org/drawingml/2006/main" noGrp="1"/>
+          </p:cNvSpPr>
+          <p:nvPr/>
+        </p:nvSpPr>
+        <p:spPr>
+          <a:xfrm xmlns:a="http://schemas.openxmlformats.org/drawingml/2006/main">
+            <a:off x="5013960" y="2190750"/>
+            <a:ext cx="2164080" cy="495300"/>
+          </a:xfrm>
+          <a:prstGeom xmlns:a="http://schemas.openxmlformats.org/drawingml/2006/main" prst="roundRect">
+            <a:avLst>
+              <a:gd name="adj" fmla="val 23077"/>
+            </a:avLst>
+          </a:prstGeom>
+          <a:solidFill xmlns:a="http://schemas.openxmlformats.org/drawingml/2006/main">
+            <a:srgbClr val="567AB8"/>
+          </a:solidFill>
+          <a:ln xmlns:a="http://schemas.openxmlformats.org/drawingml/2006/main" w="0">
+            <a:noFill/>
+            <a:prstDash val="solid"/>
+          </a:ln>
+        </p:spPr>
         <p:txBody>
           <a:bodyPr xmlns:a="http://schemas.openxmlformats.org/drawingml/2006/main" lIns="114300" tIns="76200" rIns="114300" bIns="76200" anchor="ctr">
             <a:normAutofit fontScale="100000"/>
@@ -1645,7 +2505,7 @@
           <a:lstStyle xmlns:a="http://schemas.openxmlformats.org/drawingml/2006/main"/>
           <a:p xmlns:a="http://schemas.openxmlformats.org/drawingml/2006/main">
             <a:pPr algn="ctr">
-              <a:defRPr sz="2100" b="1">
+              <a:defRPr sz="1350" b="1">
                 <a:solidFill>
                   <a:srgbClr val="FFFFFF"/>
                 </a:solidFill>
@@ -1655,7 +2515,7 @@
               </a:defRPr>
             </a:pPr>
             <a:r>
-              <a:rPr sz="2100" b="1">
+              <a:rPr sz="1350" b="1">
                 <a:solidFill>
                   <a:srgbClr val="FFFFFF"/>
                 </a:solidFill>
@@ -1663,29 +2523,29 @@
                 <a:ea typeface="Microsoft YaHei"/>
                 <a:cs typeface="Microsoft YaHei"/>
               </a:rPr>
-              <a:t>✓</a:t>
+              <a:t>用户增长</a:t>
             </a:r>
           </a:p>
         </p:txBody>
       </p:sp>
       <p:sp>
         <p:nvSpPr>
-          <p:cNvPr id="10" name="">
-            <a:extLst xmlns:a="http://schemas.openxmlformats.org/drawingml/2006/main">
-              <a:ext uri="{FF2B5EF4-FFF2-40B4-BE49-F238E27FC236}">
-                <a16:creationId xmlns:a16="http://schemas.microsoft.com/office/drawing/2014/main" id="{232B576C-6F95-4037-A7F8-0C281A2B5DEC}"/>
-              </a:ext>
-            </a:extLst>
-          </p:cNvPr>
-          <p:cNvSpPr>
-            <a:spLocks xmlns:a="http://schemas.openxmlformats.org/drawingml/2006/main" noGrp="1"/>
-          </p:cNvSpPr>
-          <p:nvPr/>
-        </p:nvSpPr>
-        <p:spPr>
-          <a:xfrm xmlns:a="http://schemas.openxmlformats.org/drawingml/2006/main">
-            <a:off x="3333750" y="3048000"/>
-            <a:ext cx="2857500" cy="381000"/>
+          <p:cNvPr id="29" name="">
+            <a:extLst xmlns:a="http://schemas.openxmlformats.org/drawingml/2006/main">
+              <a:ext uri="{FF2B5EF4-FFF2-40B4-BE49-F238E27FC236}">
+                <a16:creationId xmlns:a16="http://schemas.microsoft.com/office/drawing/2014/main" id="{83E6ACFE-4241-4E31-A552-E9BA4926C9D5}"/>
+              </a:ext>
+            </a:extLst>
+          </p:cNvPr>
+          <p:cNvSpPr>
+            <a:spLocks xmlns:a="http://schemas.openxmlformats.org/drawingml/2006/main" noGrp="1"/>
+          </p:cNvSpPr>
+          <p:nvPr/>
+        </p:nvSpPr>
+        <p:spPr>
+          <a:xfrm xmlns:a="http://schemas.openxmlformats.org/drawingml/2006/main">
+            <a:off x="5166360" y="2819400"/>
+            <a:ext cx="1859280" cy="590550"/>
           </a:xfrm>
           <a:prstGeom xmlns:a="http://schemas.openxmlformats.org/drawingml/2006/main" prst="rect">
             <a:avLst/>
@@ -1697,70 +2557,12 @@
           </a:ln>
         </p:spPr>
         <p:txBody>
-          <a:bodyPr xmlns:a="http://schemas.openxmlformats.org/drawingml/2006/main" lIns="0" tIns="0" rIns="0" bIns="0" anchor="ctr">
-            <a:normAutofit fontScale="100000"/>
-          </a:bodyPr>
-          <a:lstStyle xmlns:a="http://schemas.openxmlformats.org/drawingml/2006/main"/>
-          <a:p xmlns:a="http://schemas.openxmlformats.org/drawingml/2006/main">
-            <a:pPr algn="l">
-              <a:defRPr sz="1725" b="1">
-                <a:solidFill>
-                  <a:srgbClr val="00A8D8"/>
-                </a:solidFill>
-                <a:latin typeface="Microsoft YaHei"/>
-                <a:ea typeface="Microsoft YaHei"/>
-                <a:cs typeface="Microsoft YaHei"/>
-              </a:defRPr>
-            </a:pPr>
-            <a:r>
-              <a:rPr sz="1725" b="1">
-                <a:solidFill>
-                  <a:srgbClr val="00A8D8"/>
-                </a:solidFill>
-                <a:latin typeface="Microsoft YaHei"/>
-                <a:ea typeface="Microsoft YaHei"/>
-                <a:cs typeface="Microsoft YaHei"/>
-              </a:rPr>
-              <a:t>目标二</a:t>
-            </a:r>
-          </a:p>
-        </p:txBody>
-      </p:sp>
-      <p:sp>
-        <p:nvSpPr>
-          <p:cNvPr id="11" name="">
-            <a:extLst xmlns:a="http://schemas.openxmlformats.org/drawingml/2006/main">
-              <a:ext uri="{FF2B5EF4-FFF2-40B4-BE49-F238E27FC236}">
-                <a16:creationId xmlns:a16="http://schemas.microsoft.com/office/drawing/2014/main" id="{27064947-D8AF-4134-BA2F-42DDCF819E51}"/>
-              </a:ext>
-            </a:extLst>
-          </p:cNvPr>
-          <p:cNvSpPr>
-            <a:spLocks xmlns:a="http://schemas.openxmlformats.org/drawingml/2006/main" noGrp="1"/>
-          </p:cNvSpPr>
-          <p:nvPr/>
-        </p:nvSpPr>
-        <p:spPr>
-          <a:xfrm xmlns:a="http://schemas.openxmlformats.org/drawingml/2006/main">
-            <a:off x="3333750" y="3486150"/>
-            <a:ext cx="2857500" cy="723900"/>
-          </a:xfrm>
-          <a:prstGeom xmlns:a="http://schemas.openxmlformats.org/drawingml/2006/main" prst="rect">
-            <a:avLst/>
-          </a:prstGeom>
-          <a:noFill xmlns:a="http://schemas.openxmlformats.org/drawingml/2006/main"/>
-          <a:ln xmlns:a="http://schemas.openxmlformats.org/drawingml/2006/main" w="0">
-            <a:noFill/>
-            <a:prstDash val="solid"/>
-          </a:ln>
-        </p:spPr>
-        <p:txBody>
           <a:bodyPr xmlns:a="http://schemas.openxmlformats.org/drawingml/2006/main" lIns="0" tIns="0" rIns="0" bIns="0" anchor="t">
             <a:normAutofit fontScale="100000"/>
           </a:bodyPr>
           <a:lstStyle xmlns:a="http://schemas.openxmlformats.org/drawingml/2006/main"/>
           <a:p xmlns:a="http://schemas.openxmlformats.org/drawingml/2006/main">
-            <a:pPr algn="l">
+            <a:pPr algn="ctr">
               <a:defRPr sz="1200" b="0">
                 <a:solidFill>
                   <a:srgbClr val="475569"/>
@@ -1779,39 +2581,459 @@
                 <a:ea typeface="Microsoft YaHei"/>
                 <a:cs typeface="Microsoft YaHei"/>
               </a:rPr>
-              <a:t>说明目标及其完成情况</a:t>
+              <a:t>扩大有效用户</a:t>
             </a:r>
           </a:p>
-        </p:txBody>
-      </p:sp>
-      <p:sp>
-        <p:nvSpPr>
-          <p:cNvPr id="12" name="">
-            <a:extLst xmlns:a="http://schemas.openxmlformats.org/drawingml/2006/main">
-              <a:ext uri="{FF2B5EF4-FFF2-40B4-BE49-F238E27FC236}">
-                <a16:creationId xmlns:a16="http://schemas.microsoft.com/office/drawing/2014/main" id="{70F9E765-3070-4232-A2B3-B755D3256E43}"/>
-              </a:ext>
-            </a:extLst>
-          </p:cNvPr>
-          <p:cNvSpPr>
-            <a:spLocks xmlns:a="http://schemas.openxmlformats.org/drawingml/2006/main" noGrp="1"/>
-          </p:cNvSpPr>
-          <p:nvPr/>
-        </p:nvSpPr>
-        <p:spPr>
-          <a:xfrm xmlns:a="http://schemas.openxmlformats.org/drawingml/2006/main">
-            <a:off x="6477000" y="3200400"/>
-            <a:ext cx="990600" cy="990600"/>
-          </a:xfrm>
-          <a:prstGeom xmlns:a="http://schemas.openxmlformats.org/drawingml/2006/main" prst="ellipse">
-            <a:avLst/>
+          <a:p xmlns:a="http://schemas.openxmlformats.org/drawingml/2006/main">
+            <a:pPr algn="ctr">
+              <a:defRPr sz="1200" b="0">
+                <a:solidFill>
+                  <a:srgbClr val="475569"/>
+                </a:solidFill>
+                <a:latin typeface="Microsoft YaHei"/>
+                <a:ea typeface="Microsoft YaHei"/>
+                <a:cs typeface="Microsoft YaHei"/>
+              </a:defRPr>
+            </a:pPr>
+            <a:r>
+              <a:rPr sz="1200" b="0">
+                <a:solidFill>
+                  <a:srgbClr val="475569"/>
+                </a:solidFill>
+                <a:latin typeface="Microsoft YaHei"/>
+                <a:ea typeface="Microsoft YaHei"/>
+                <a:cs typeface="Microsoft YaHei"/>
+              </a:rPr>
+              <a:t>并提升持续活跃</a:t>
+            </a:r>
+          </a:p>
+        </p:txBody>
+      </p:sp>
+      <p:sp>
+        <p:nvSpPr>
+          <p:cNvPr id="30" name="">
+            <a:extLst xmlns:a="http://schemas.openxmlformats.org/drawingml/2006/main">
+              <a:ext uri="{FF2B5EF4-FFF2-40B4-BE49-F238E27FC236}">
+                <a16:creationId xmlns:a16="http://schemas.microsoft.com/office/drawing/2014/main" id="{45D5C382-AE9B-408B-918F-B90624BE2007}"/>
+              </a:ext>
+            </a:extLst>
+          </p:cNvPr>
+          <p:cNvSpPr>
+            <a:spLocks xmlns:a="http://schemas.openxmlformats.org/drawingml/2006/main" noGrp="1"/>
+          </p:cNvSpPr>
+          <p:nvPr/>
+        </p:nvSpPr>
+        <p:spPr>
+          <a:xfrm xmlns:a="http://schemas.openxmlformats.org/drawingml/2006/main">
+            <a:off x="5166360" y="3543300"/>
+            <a:ext cx="1859280" cy="476250"/>
+          </a:xfrm>
+          <a:prstGeom xmlns:a="http://schemas.openxmlformats.org/drawingml/2006/main" prst="roundRect">
+            <a:avLst>
+              <a:gd name="adj" fmla="val 24000"/>
+            </a:avLst>
           </a:prstGeom>
           <a:solidFill xmlns:a="http://schemas.openxmlformats.org/drawingml/2006/main">
             <a:srgbClr val="FFFFFF"/>
           </a:solidFill>
+          <a:ln xmlns:a="http://schemas.openxmlformats.org/drawingml/2006/main" w="9525">
+            <a:solidFill>
+              <a:srgbClr val="C7D8E7"/>
+            </a:solidFill>
+            <a:prstDash val="solid"/>
+          </a:ln>
+        </p:spPr>
+      </p:sp>
+      <p:sp>
+        <p:nvSpPr>
+          <p:cNvPr id="31" name="">
+            <a:extLst xmlns:a="http://schemas.openxmlformats.org/drawingml/2006/main">
+              <a:ext uri="{FF2B5EF4-FFF2-40B4-BE49-F238E27FC236}">
+                <a16:creationId xmlns:a16="http://schemas.microsoft.com/office/drawing/2014/main" id="{40E4D0AA-4BA0-47A2-8739-9A5B65D78BDD}"/>
+              </a:ext>
+            </a:extLst>
+          </p:cNvPr>
+          <p:cNvSpPr>
+            <a:spLocks xmlns:a="http://schemas.openxmlformats.org/drawingml/2006/main" noGrp="1"/>
+          </p:cNvSpPr>
+          <p:nvPr/>
+        </p:nvSpPr>
+        <p:spPr>
+          <a:xfrm xmlns:a="http://schemas.openxmlformats.org/drawingml/2006/main">
+            <a:off x="5261610" y="3609975"/>
+            <a:ext cx="767639" cy="342900"/>
+          </a:xfrm>
+          <a:prstGeom xmlns:a="http://schemas.openxmlformats.org/drawingml/2006/main" prst="rect">
+            <a:avLst/>
+          </a:prstGeom>
+          <a:noFill xmlns:a="http://schemas.openxmlformats.org/drawingml/2006/main"/>
+          <a:ln xmlns:a="http://schemas.openxmlformats.org/drawingml/2006/main" w="0">
+            <a:noFill/>
+            <a:prstDash val="solid"/>
+          </a:ln>
+        </p:spPr>
+        <p:txBody>
+          <a:bodyPr xmlns:a="http://schemas.openxmlformats.org/drawingml/2006/main" lIns="0" tIns="0" rIns="0" bIns="0" anchor="ctr">
+            <a:normAutofit fontScale="100000"/>
+          </a:bodyPr>
+          <a:lstStyle xmlns:a="http://schemas.openxmlformats.org/drawingml/2006/main"/>
+          <a:p xmlns:a="http://schemas.openxmlformats.org/drawingml/2006/main">
+            <a:pPr algn="ctr">
+              <a:defRPr sz="1500" b="1">
+                <a:solidFill>
+                  <a:srgbClr val="1677C8"/>
+                </a:solidFill>
+                <a:latin typeface="Microsoft YaHei"/>
+                <a:ea typeface="Microsoft YaHei"/>
+                <a:cs typeface="Microsoft YaHei"/>
+              </a:defRPr>
+            </a:pPr>
+            <a:r>
+              <a:rPr sz="1500" b="1">
+                <a:solidFill>
+                  <a:srgbClr val="1677C8"/>
+                </a:solidFill>
+                <a:latin typeface="Microsoft YaHei"/>
+                <a:ea typeface="Microsoft YaHei"/>
+                <a:cs typeface="Microsoft YaHei"/>
+              </a:rPr>
+              <a:t>66.8万</a:t>
+            </a:r>
+          </a:p>
+        </p:txBody>
+      </p:sp>
+      <p:sp>
+        <p:nvSpPr>
+          <p:cNvPr id="32" name="">
+            <a:extLst xmlns:a="http://schemas.openxmlformats.org/drawingml/2006/main">
+              <a:ext uri="{FF2B5EF4-FFF2-40B4-BE49-F238E27FC236}">
+                <a16:creationId xmlns:a16="http://schemas.microsoft.com/office/drawing/2014/main" id="{EB684271-A848-4F96-A051-A3FA84EAF915}"/>
+              </a:ext>
+            </a:extLst>
+          </p:cNvPr>
+          <p:cNvSpPr>
+            <a:spLocks xmlns:a="http://schemas.openxmlformats.org/drawingml/2006/main" noGrp="1"/>
+          </p:cNvSpPr>
+          <p:nvPr/>
+        </p:nvSpPr>
+        <p:spPr>
+          <a:xfrm xmlns:a="http://schemas.openxmlformats.org/drawingml/2006/main">
+            <a:off x="6067349" y="3609975"/>
+            <a:ext cx="863041" cy="342900"/>
+          </a:xfrm>
+          <a:prstGeom xmlns:a="http://schemas.openxmlformats.org/drawingml/2006/main" prst="rect">
+            <a:avLst/>
+          </a:prstGeom>
+          <a:noFill xmlns:a="http://schemas.openxmlformats.org/drawingml/2006/main"/>
+          <a:ln xmlns:a="http://schemas.openxmlformats.org/drawingml/2006/main" w="0">
+            <a:noFill/>
+            <a:prstDash val="solid"/>
+          </a:ln>
+        </p:spPr>
+        <p:txBody>
+          <a:bodyPr xmlns:a="http://schemas.openxmlformats.org/drawingml/2006/main" lIns="0" tIns="0" rIns="0" bIns="0" anchor="ctr">
+            <a:normAutofit fontScale="100000"/>
+          </a:bodyPr>
+          <a:lstStyle xmlns:a="http://schemas.openxmlformats.org/drawingml/2006/main"/>
+          <a:p xmlns:a="http://schemas.openxmlformats.org/drawingml/2006/main">
+            <a:pPr algn="ctr">
+              <a:defRPr sz="1200" b="0">
+                <a:solidFill>
+                  <a:srgbClr val="475569"/>
+                </a:solidFill>
+                <a:latin typeface="Microsoft YaHei"/>
+                <a:ea typeface="Microsoft YaHei"/>
+                <a:cs typeface="Microsoft YaHei"/>
+              </a:defRPr>
+            </a:pPr>
+            <a:r>
+              <a:rPr sz="1200" b="0">
+                <a:solidFill>
+                  <a:srgbClr val="475569"/>
+                </a:solidFill>
+                <a:latin typeface="Microsoft YaHei"/>
+                <a:ea typeface="Microsoft YaHei"/>
+                <a:cs typeface="Microsoft YaHei"/>
+              </a:rPr>
+              <a:t>新增用户</a:t>
+            </a:r>
+          </a:p>
+        </p:txBody>
+      </p:sp>
+      <p:sp>
+        <p:nvSpPr>
+          <p:cNvPr id="33" name="">
+            <a:extLst xmlns:a="http://schemas.openxmlformats.org/drawingml/2006/main">
+              <a:ext uri="{FF2B5EF4-FFF2-40B4-BE49-F238E27FC236}">
+                <a16:creationId xmlns:a16="http://schemas.microsoft.com/office/drawing/2014/main" id="{822E1296-A95B-43C9-973C-CA52A9CEFDFC}"/>
+              </a:ext>
+            </a:extLst>
+          </p:cNvPr>
+          <p:cNvSpPr>
+            <a:spLocks xmlns:a="http://schemas.openxmlformats.org/drawingml/2006/main" noGrp="1"/>
+          </p:cNvSpPr>
+          <p:nvPr/>
+        </p:nvSpPr>
+        <p:spPr>
+          <a:xfrm xmlns:a="http://schemas.openxmlformats.org/drawingml/2006/main">
+            <a:off x="5166360" y="4095750"/>
+            <a:ext cx="1859280" cy="476250"/>
+          </a:xfrm>
+          <a:prstGeom xmlns:a="http://schemas.openxmlformats.org/drawingml/2006/main" prst="roundRect">
+            <a:avLst>
+              <a:gd name="adj" fmla="val 24000"/>
+            </a:avLst>
+          </a:prstGeom>
+          <a:solidFill xmlns:a="http://schemas.openxmlformats.org/drawingml/2006/main">
+            <a:srgbClr val="FFFFFF"/>
+          </a:solidFill>
+          <a:ln xmlns:a="http://schemas.openxmlformats.org/drawingml/2006/main" w="9525">
+            <a:solidFill>
+              <a:srgbClr val="C7D8E7"/>
+            </a:solidFill>
+            <a:prstDash val="solid"/>
+          </a:ln>
+        </p:spPr>
+      </p:sp>
+      <p:sp>
+        <p:nvSpPr>
+          <p:cNvPr id="34" name="">
+            <a:extLst xmlns:a="http://schemas.openxmlformats.org/drawingml/2006/main">
+              <a:ext uri="{FF2B5EF4-FFF2-40B4-BE49-F238E27FC236}">
+                <a16:creationId xmlns:a16="http://schemas.microsoft.com/office/drawing/2014/main" id="{641D8440-3031-4DED-9E45-BA3226B463C6}"/>
+              </a:ext>
+            </a:extLst>
+          </p:cNvPr>
+          <p:cNvSpPr>
+            <a:spLocks xmlns:a="http://schemas.openxmlformats.org/drawingml/2006/main" noGrp="1"/>
+          </p:cNvSpPr>
+          <p:nvPr/>
+        </p:nvSpPr>
+        <p:spPr>
+          <a:xfrm xmlns:a="http://schemas.openxmlformats.org/drawingml/2006/main">
+            <a:off x="5261610" y="4162425"/>
+            <a:ext cx="767639" cy="342900"/>
+          </a:xfrm>
+          <a:prstGeom xmlns:a="http://schemas.openxmlformats.org/drawingml/2006/main" prst="rect">
+            <a:avLst/>
+          </a:prstGeom>
+          <a:noFill xmlns:a="http://schemas.openxmlformats.org/drawingml/2006/main"/>
+          <a:ln xmlns:a="http://schemas.openxmlformats.org/drawingml/2006/main" w="0">
+            <a:noFill/>
+            <a:prstDash val="solid"/>
+          </a:ln>
+        </p:spPr>
+        <p:txBody>
+          <a:bodyPr xmlns:a="http://schemas.openxmlformats.org/drawingml/2006/main" lIns="0" tIns="0" rIns="0" bIns="0" anchor="ctr">
+            <a:normAutofit fontScale="100000"/>
+          </a:bodyPr>
+          <a:lstStyle xmlns:a="http://schemas.openxmlformats.org/drawingml/2006/main"/>
+          <a:p xmlns:a="http://schemas.openxmlformats.org/drawingml/2006/main">
+            <a:pPr algn="ctr">
+              <a:defRPr sz="1500" b="1">
+                <a:solidFill>
+                  <a:srgbClr val="1677C8"/>
+                </a:solidFill>
+                <a:latin typeface="Microsoft YaHei"/>
+                <a:ea typeface="Microsoft YaHei"/>
+                <a:cs typeface="Microsoft YaHei"/>
+              </a:defRPr>
+            </a:pPr>
+            <a:r>
+              <a:rPr sz="1500" b="1">
+                <a:solidFill>
+                  <a:srgbClr val="1677C8"/>
+                </a:solidFill>
+                <a:latin typeface="Microsoft YaHei"/>
+                <a:ea typeface="Microsoft YaHei"/>
+                <a:cs typeface="Microsoft YaHei"/>
+              </a:rPr>
+              <a:t>42%</a:t>
+            </a:r>
+          </a:p>
+        </p:txBody>
+      </p:sp>
+      <p:sp>
+        <p:nvSpPr>
+          <p:cNvPr id="35" name="">
+            <a:extLst xmlns:a="http://schemas.openxmlformats.org/drawingml/2006/main">
+              <a:ext uri="{FF2B5EF4-FFF2-40B4-BE49-F238E27FC236}">
+                <a16:creationId xmlns:a16="http://schemas.microsoft.com/office/drawing/2014/main" id="{8F839D8A-4D90-4273-B671-C87031FAE528}"/>
+              </a:ext>
+            </a:extLst>
+          </p:cNvPr>
+          <p:cNvSpPr>
+            <a:spLocks xmlns:a="http://schemas.openxmlformats.org/drawingml/2006/main" noGrp="1"/>
+          </p:cNvSpPr>
+          <p:nvPr/>
+        </p:nvSpPr>
+        <p:spPr>
+          <a:xfrm xmlns:a="http://schemas.openxmlformats.org/drawingml/2006/main">
+            <a:off x="6067349" y="4162425"/>
+            <a:ext cx="863041" cy="342900"/>
+          </a:xfrm>
+          <a:prstGeom xmlns:a="http://schemas.openxmlformats.org/drawingml/2006/main" prst="rect">
+            <a:avLst/>
+          </a:prstGeom>
+          <a:noFill xmlns:a="http://schemas.openxmlformats.org/drawingml/2006/main"/>
+          <a:ln xmlns:a="http://schemas.openxmlformats.org/drawingml/2006/main" w="0">
+            <a:noFill/>
+            <a:prstDash val="solid"/>
+          </a:ln>
+        </p:spPr>
+        <p:txBody>
+          <a:bodyPr xmlns:a="http://schemas.openxmlformats.org/drawingml/2006/main" lIns="0" tIns="0" rIns="0" bIns="0" anchor="ctr">
+            <a:normAutofit fontScale="100000"/>
+          </a:bodyPr>
+          <a:lstStyle xmlns:a="http://schemas.openxmlformats.org/drawingml/2006/main"/>
+          <a:p xmlns:a="http://schemas.openxmlformats.org/drawingml/2006/main">
+            <a:pPr algn="ctr">
+              <a:defRPr sz="1200" b="0">
+                <a:solidFill>
+                  <a:srgbClr val="475569"/>
+                </a:solidFill>
+                <a:latin typeface="Microsoft YaHei"/>
+                <a:ea typeface="Microsoft YaHei"/>
+                <a:cs typeface="Microsoft YaHei"/>
+              </a:defRPr>
+            </a:pPr>
+            <a:r>
+              <a:rPr sz="1200" b="0">
+                <a:solidFill>
+                  <a:srgbClr val="475569"/>
+                </a:solidFill>
+                <a:latin typeface="Microsoft YaHei"/>
+                <a:ea typeface="Microsoft YaHei"/>
+                <a:cs typeface="Microsoft YaHei"/>
+              </a:rPr>
+              <a:t>留存率</a:t>
+            </a:r>
+          </a:p>
+        </p:txBody>
+      </p:sp>
+      <p:sp>
+        <p:nvSpPr>
+          <p:cNvPr id="36" name="">
+            <a:extLst xmlns:a="http://schemas.openxmlformats.org/drawingml/2006/main">
+              <a:ext uri="{FF2B5EF4-FFF2-40B4-BE49-F238E27FC236}">
+                <a16:creationId xmlns:a16="http://schemas.microsoft.com/office/drawing/2014/main" id="{AC8BF5C2-3E33-428D-A309-B0B48A219BC2}"/>
+              </a:ext>
+            </a:extLst>
+          </p:cNvPr>
+          <p:cNvSpPr>
+            <a:spLocks xmlns:a="http://schemas.openxmlformats.org/drawingml/2006/main" noGrp="1"/>
+          </p:cNvSpPr>
+          <p:nvPr/>
+        </p:nvSpPr>
+        <p:spPr>
+          <a:xfrm xmlns:a="http://schemas.openxmlformats.org/drawingml/2006/main">
+            <a:off x="5013960" y="5200650"/>
+            <a:ext cx="2164080" cy="419100"/>
+          </a:xfrm>
+          <a:prstGeom xmlns:a="http://schemas.openxmlformats.org/drawingml/2006/main" prst="chevron">
+            <a:avLst/>
+          </a:prstGeom>
+          <a:solidFill xmlns:a="http://schemas.openxmlformats.org/drawingml/2006/main">
+            <a:srgbClr val="567AB8"/>
+          </a:solidFill>
+          <a:ln xmlns:a="http://schemas.openxmlformats.org/drawingml/2006/main" w="9525">
+            <a:solidFill>
+              <a:srgbClr val="FFFFFF"/>
+            </a:solidFill>
+            <a:prstDash val="solid"/>
+          </a:ln>
+        </p:spPr>
+        <p:txBody>
+          <a:bodyPr xmlns:a="http://schemas.openxmlformats.org/drawingml/2006/main" lIns="95250" tIns="19050" rIns="133350" bIns="19050" anchor="ctr">
+            <a:normAutofit fontScale="100000"/>
+          </a:bodyPr>
+          <a:lstStyle xmlns:a="http://schemas.openxmlformats.org/drawingml/2006/main"/>
+          <a:p xmlns:a="http://schemas.openxmlformats.org/drawingml/2006/main">
+            <a:pPr algn="ctr">
+              <a:defRPr sz="1200" b="1">
+                <a:solidFill>
+                  <a:srgbClr val="FFFFFF"/>
+                </a:solidFill>
+                <a:latin typeface="Microsoft YaHei"/>
+                <a:ea typeface="Microsoft YaHei"/>
+                <a:cs typeface="Microsoft YaHei"/>
+              </a:defRPr>
+            </a:pPr>
+            <a:r>
+              <a:rPr sz="1200" b="1">
+                <a:solidFill>
+                  <a:srgbClr val="FFFFFF"/>
+                </a:solidFill>
+                <a:latin typeface="Microsoft YaHei"/>
+                <a:ea typeface="Microsoft YaHei"/>
+                <a:cs typeface="Microsoft YaHei"/>
+              </a:rPr>
+              <a:t>改善用户体验</a:t>
+            </a:r>
+          </a:p>
+        </p:txBody>
+      </p:sp>
+      <p:sp>
+        <p:nvSpPr>
+          <p:cNvPr id="37" name="PPAGENT_CONNECTOR|from=goal-kpi-goal|fromSide=bottom|to=goal-kpi-column-3|toSide=top">
+            <a:extLst xmlns:a="http://schemas.openxmlformats.org/drawingml/2006/main">
+              <a:ext uri="{FF2B5EF4-FFF2-40B4-BE49-F238E27FC236}">
+                <a16:creationId xmlns:a16="http://schemas.microsoft.com/office/drawing/2014/main" id="{F6C098E8-2706-45BE-B9F3-EE8A5C703414}"/>
+              </a:ext>
+            </a:extLst>
+          </p:cNvPr>
+          <p:cNvSpPr>
+            <a:spLocks xmlns:a="http://schemas.openxmlformats.org/drawingml/2006/main" noGrp="1"/>
+          </p:cNvSpPr>
+          <p:nvPr/>
+        </p:nvSpPr>
+        <p:spPr>
+          <a:xfrm xmlns:a="http://schemas.openxmlformats.org/drawingml/2006/main" flipH="0" flipV="0">
+            <a:off x="6096000" y="1847850"/>
+            <a:ext cx="2278380" cy="342900"/>
+          </a:xfrm>
+          <a:prstGeom xmlns:a="http://schemas.openxmlformats.org/drawingml/2006/main" prst="line">
+            <a:avLst/>
+          </a:prstGeom>
+          <a:noFill xmlns:a="http://schemas.openxmlformats.org/drawingml/2006/main"/>
           <a:ln xmlns:a="http://schemas.openxmlformats.org/drawingml/2006/main" w="19050">
             <a:solidFill>
-              <a:srgbClr val="00A8D8"/>
+              <a:srgbClr val="6483BB"/>
+            </a:solidFill>
+            <a:prstDash val="solid"/>
+          </a:ln>
+        </p:spPr>
+      </p:sp>
+      <p:sp>
+        <p:nvSpPr>
+          <p:cNvPr id="38" name="PPAGENT_QA|parent=goal-kpi-column-3|domains=goal-kpi-columns">
+            <a:extLst xmlns:a="http://schemas.openxmlformats.org/drawingml/2006/main">
+              <a:ext uri="{FF2B5EF4-FFF2-40B4-BE49-F238E27FC236}">
+                <a16:creationId xmlns:a16="http://schemas.microsoft.com/office/drawing/2014/main" id="{E1DBBF82-05E9-4A3D-8CC5-3ACB82E2C830}"/>
+              </a:ext>
+            </a:extLst>
+          </p:cNvPr>
+          <p:cNvSpPr>
+            <a:spLocks xmlns:a="http://schemas.openxmlformats.org/drawingml/2006/main" noGrp="1"/>
+          </p:cNvSpPr>
+          <p:nvPr/>
+        </p:nvSpPr>
+        <p:spPr>
+          <a:xfrm xmlns:a="http://schemas.openxmlformats.org/drawingml/2006/main">
+            <a:off x="7292340" y="2190750"/>
+            <a:ext cx="2164080" cy="3429000"/>
+          </a:xfrm>
+          <a:prstGeom xmlns:a="http://schemas.openxmlformats.org/drawingml/2006/main" prst="roundRect">
+            <a:avLst>
+              <a:gd name="adj" fmla="val 5282"/>
+            </a:avLst>
+          </a:prstGeom>
+          <a:solidFill xmlns:a="http://schemas.openxmlformats.org/drawingml/2006/main">
+            <a:srgbClr val="F1F5F9"/>
+          </a:solidFill>
+          <a:ln xmlns:a="http://schemas.openxmlformats.org/drawingml/2006/main" w="9525">
+            <a:solidFill>
+              <a:srgbClr val="D8E3ED"/>
             </a:solidFill>
             <a:prstDash val="solid"/>
           </a:ln>
@@ -1822,16 +3044,49 @@
           <a:effectRef xmlns:a="http://schemas.openxmlformats.org/drawingml/2006/main" idx="4"/>
           <a:fontRef xmlns:a="http://schemas.openxmlformats.org/drawingml/2006/main" idx="major"/>
         </p:style>
+      </p:sp>
+      <p:sp>
+        <p:nvSpPr>
+          <p:cNvPr id="39" name="">
+            <a:extLst xmlns:a="http://schemas.openxmlformats.org/drawingml/2006/main">
+              <a:ext uri="{FF2B5EF4-FFF2-40B4-BE49-F238E27FC236}">
+                <a16:creationId xmlns:a16="http://schemas.microsoft.com/office/drawing/2014/main" id="{00690875-9657-4030-889E-4ACE7F8FF65E}"/>
+              </a:ext>
+            </a:extLst>
+          </p:cNvPr>
+          <p:cNvSpPr>
+            <a:spLocks xmlns:a="http://schemas.openxmlformats.org/drawingml/2006/main" noGrp="1"/>
+          </p:cNvSpPr>
+          <p:nvPr/>
+        </p:nvSpPr>
+        <p:spPr>
+          <a:xfrm xmlns:a="http://schemas.openxmlformats.org/drawingml/2006/main">
+            <a:off x="7292340" y="2190750"/>
+            <a:ext cx="2164080" cy="495300"/>
+          </a:xfrm>
+          <a:prstGeom xmlns:a="http://schemas.openxmlformats.org/drawingml/2006/main" prst="roundRect">
+            <a:avLst>
+              <a:gd name="adj" fmla="val 23077"/>
+            </a:avLst>
+          </a:prstGeom>
+          <a:solidFill xmlns:a="http://schemas.openxmlformats.org/drawingml/2006/main">
+            <a:srgbClr val="567AB8"/>
+          </a:solidFill>
+          <a:ln xmlns:a="http://schemas.openxmlformats.org/drawingml/2006/main" w="0">
+            <a:noFill/>
+            <a:prstDash val="solid"/>
+          </a:ln>
+        </p:spPr>
         <p:txBody>
           <a:bodyPr xmlns:a="http://schemas.openxmlformats.org/drawingml/2006/main" lIns="114300" tIns="76200" rIns="114300" bIns="76200" anchor="ctr">
-            <a:normAutofit fontScale="95556"/>
+            <a:normAutofit fontScale="100000"/>
           </a:bodyPr>
           <a:lstStyle xmlns:a="http://schemas.openxmlformats.org/drawingml/2006/main"/>
           <a:p xmlns:a="http://schemas.openxmlformats.org/drawingml/2006/main">
             <a:pPr algn="ctr">
-              <a:defRPr sz="1275" b="1">
-                <a:solidFill>
-                  <a:srgbClr val="00A8D8"/>
+              <a:defRPr sz="1350" b="1">
+                <a:solidFill>
+                  <a:srgbClr val="FFFFFF"/>
                 </a:solidFill>
                 <a:latin typeface="Microsoft YaHei"/>
                 <a:ea typeface="Microsoft YaHei"/>
@@ -1839,22 +3094,80 @@
               </a:defRPr>
             </a:pPr>
             <a:r>
-              <a:rPr sz="1275" b="1">
-                <a:solidFill>
-                  <a:srgbClr val="00A8D8"/>
+              <a:rPr sz="1350" b="1">
+                <a:solidFill>
+                  <a:srgbClr val="FFFFFF"/>
                 </a:solidFill>
                 <a:latin typeface="Microsoft YaHei"/>
                 <a:ea typeface="Microsoft YaHei"/>
                 <a:cs typeface="Microsoft YaHei"/>
               </a:rPr>
-              <a:t>5K</a:t>
+              <a:t>产品技术</a:t>
+            </a:r>
+          </a:p>
+        </p:txBody>
+      </p:sp>
+      <p:sp>
+        <p:nvSpPr>
+          <p:cNvPr id="40" name="">
+            <a:extLst xmlns:a="http://schemas.openxmlformats.org/drawingml/2006/main">
+              <a:ext uri="{FF2B5EF4-FFF2-40B4-BE49-F238E27FC236}">
+                <a16:creationId xmlns:a16="http://schemas.microsoft.com/office/drawing/2014/main" id="{D167C8ED-6A36-4FAB-9C2D-96D1EE982907}"/>
+              </a:ext>
+            </a:extLst>
+          </p:cNvPr>
+          <p:cNvSpPr>
+            <a:spLocks xmlns:a="http://schemas.openxmlformats.org/drawingml/2006/main" noGrp="1"/>
+          </p:cNvSpPr>
+          <p:nvPr/>
+        </p:nvSpPr>
+        <p:spPr>
+          <a:xfrm xmlns:a="http://schemas.openxmlformats.org/drawingml/2006/main">
+            <a:off x="7444740" y="2819400"/>
+            <a:ext cx="1859280" cy="590550"/>
+          </a:xfrm>
+          <a:prstGeom xmlns:a="http://schemas.openxmlformats.org/drawingml/2006/main" prst="rect">
+            <a:avLst/>
+          </a:prstGeom>
+          <a:noFill xmlns:a="http://schemas.openxmlformats.org/drawingml/2006/main"/>
+          <a:ln xmlns:a="http://schemas.openxmlformats.org/drawingml/2006/main" w="0">
+            <a:noFill/>
+            <a:prstDash val="solid"/>
+          </a:ln>
+        </p:spPr>
+        <p:txBody>
+          <a:bodyPr xmlns:a="http://schemas.openxmlformats.org/drawingml/2006/main" lIns="0" tIns="0" rIns="0" bIns="0" anchor="t">
+            <a:normAutofit fontScale="100000"/>
+          </a:bodyPr>
+          <a:lstStyle xmlns:a="http://schemas.openxmlformats.org/drawingml/2006/main"/>
+          <a:p xmlns:a="http://schemas.openxmlformats.org/drawingml/2006/main">
+            <a:pPr algn="ctr">
+              <a:defRPr sz="1200" b="0">
+                <a:solidFill>
+                  <a:srgbClr val="475569"/>
+                </a:solidFill>
+                <a:latin typeface="Microsoft YaHei"/>
+                <a:ea typeface="Microsoft YaHei"/>
+                <a:cs typeface="Microsoft YaHei"/>
+              </a:defRPr>
+            </a:pPr>
+            <a:r>
+              <a:rPr sz="1200" b="0">
+                <a:solidFill>
+                  <a:srgbClr val="475569"/>
+                </a:solidFill>
+                <a:latin typeface="Microsoft YaHei"/>
+                <a:ea typeface="Microsoft YaHei"/>
+                <a:cs typeface="Microsoft YaHei"/>
+              </a:rPr>
+              <a:t>保障产品稳定</a:t>
             </a:r>
           </a:p>
           <a:p xmlns:a="http://schemas.openxmlformats.org/drawingml/2006/main">
             <a:pPr algn="ctr">
-              <a:defRPr sz="1275" b="1">
-                <a:solidFill>
-                  <a:srgbClr val="00A8D8"/>
+              <a:defRPr sz="1200" b="0">
+                <a:solidFill>
+                  <a:srgbClr val="475569"/>
                 </a:solidFill>
                 <a:latin typeface="Microsoft YaHei"/>
                 <a:ea typeface="Microsoft YaHei"/>
@@ -1862,47 +3175,444 @@
               </a:defRPr>
             </a:pPr>
             <a:r>
-              <a:rPr sz="1275" b="1">
-                <a:solidFill>
-                  <a:srgbClr val="00A8D8"/>
+              <a:rPr sz="1200" b="0">
+                <a:solidFill>
+                  <a:srgbClr val="475569"/>
                 </a:solidFill>
                 <a:latin typeface="Microsoft YaHei"/>
                 <a:ea typeface="Microsoft YaHei"/>
                 <a:cs typeface="Microsoft YaHei"/>
               </a:rPr>
-              <a:t>指标 A</a:t>
+              <a:t>并缩短交付周期</a:t>
             </a:r>
           </a:p>
         </p:txBody>
       </p:sp>
       <p:sp>
         <p:nvSpPr>
-          <p:cNvPr id="13" name="">
-            <a:extLst xmlns:a="http://schemas.openxmlformats.org/drawingml/2006/main">
-              <a:ext uri="{FF2B5EF4-FFF2-40B4-BE49-F238E27FC236}">
-                <a16:creationId xmlns:a16="http://schemas.microsoft.com/office/drawing/2014/main" id="{CC9AB603-2B32-4D8E-AB3B-6E78CD5C5B83}"/>
-              </a:ext>
-            </a:extLst>
-          </p:cNvPr>
-          <p:cNvSpPr>
-            <a:spLocks xmlns:a="http://schemas.openxmlformats.org/drawingml/2006/main" noGrp="1"/>
-          </p:cNvSpPr>
-          <p:nvPr/>
-        </p:nvSpPr>
-        <p:spPr>
-          <a:xfrm xmlns:a="http://schemas.openxmlformats.org/drawingml/2006/main">
-            <a:off x="7677150" y="3200400"/>
-            <a:ext cx="990600" cy="990600"/>
-          </a:xfrm>
-          <a:prstGeom xmlns:a="http://schemas.openxmlformats.org/drawingml/2006/main" prst="ellipse">
-            <a:avLst/>
+          <p:cNvPr id="41" name="">
+            <a:extLst xmlns:a="http://schemas.openxmlformats.org/drawingml/2006/main">
+              <a:ext uri="{FF2B5EF4-FFF2-40B4-BE49-F238E27FC236}">
+                <a16:creationId xmlns:a16="http://schemas.microsoft.com/office/drawing/2014/main" id="{E7DE88C6-7006-444F-88AE-853C3C1A183E}"/>
+              </a:ext>
+            </a:extLst>
+          </p:cNvPr>
+          <p:cNvSpPr>
+            <a:spLocks xmlns:a="http://schemas.openxmlformats.org/drawingml/2006/main" noGrp="1"/>
+          </p:cNvSpPr>
+          <p:nvPr/>
+        </p:nvSpPr>
+        <p:spPr>
+          <a:xfrm xmlns:a="http://schemas.openxmlformats.org/drawingml/2006/main">
+            <a:off x="7444740" y="3543300"/>
+            <a:ext cx="1859280" cy="476250"/>
+          </a:xfrm>
+          <a:prstGeom xmlns:a="http://schemas.openxmlformats.org/drawingml/2006/main" prst="roundRect">
+            <a:avLst>
+              <a:gd name="adj" fmla="val 24000"/>
+            </a:avLst>
           </a:prstGeom>
           <a:solidFill xmlns:a="http://schemas.openxmlformats.org/drawingml/2006/main">
             <a:srgbClr val="FFFFFF"/>
           </a:solidFill>
+          <a:ln xmlns:a="http://schemas.openxmlformats.org/drawingml/2006/main" w="9525">
+            <a:solidFill>
+              <a:srgbClr val="C7D8E7"/>
+            </a:solidFill>
+            <a:prstDash val="solid"/>
+          </a:ln>
+        </p:spPr>
+      </p:sp>
+      <p:sp>
+        <p:nvSpPr>
+          <p:cNvPr id="42" name="">
+            <a:extLst xmlns:a="http://schemas.openxmlformats.org/drawingml/2006/main">
+              <a:ext uri="{FF2B5EF4-FFF2-40B4-BE49-F238E27FC236}">
+                <a16:creationId xmlns:a16="http://schemas.microsoft.com/office/drawing/2014/main" id="{5D1BA92A-C0BD-41E3-A135-0D8BA40AA2F7}"/>
+              </a:ext>
+            </a:extLst>
+          </p:cNvPr>
+          <p:cNvSpPr>
+            <a:spLocks xmlns:a="http://schemas.openxmlformats.org/drawingml/2006/main" noGrp="1"/>
+          </p:cNvSpPr>
+          <p:nvPr/>
+        </p:nvSpPr>
+        <p:spPr>
+          <a:xfrm xmlns:a="http://schemas.openxmlformats.org/drawingml/2006/main">
+            <a:off x="7539990" y="3609975"/>
+            <a:ext cx="767639" cy="342900"/>
+          </a:xfrm>
+          <a:prstGeom xmlns:a="http://schemas.openxmlformats.org/drawingml/2006/main" prst="rect">
+            <a:avLst/>
+          </a:prstGeom>
+          <a:noFill xmlns:a="http://schemas.openxmlformats.org/drawingml/2006/main"/>
+          <a:ln xmlns:a="http://schemas.openxmlformats.org/drawingml/2006/main" w="0">
+            <a:noFill/>
+            <a:prstDash val="solid"/>
+          </a:ln>
+        </p:spPr>
+        <p:txBody>
+          <a:bodyPr xmlns:a="http://schemas.openxmlformats.org/drawingml/2006/main" lIns="0" tIns="0" rIns="0" bIns="0" anchor="ctr">
+            <a:normAutofit fontScale="100000"/>
+          </a:bodyPr>
+          <a:lstStyle xmlns:a="http://schemas.openxmlformats.org/drawingml/2006/main"/>
+          <a:p xmlns:a="http://schemas.openxmlformats.org/drawingml/2006/main">
+            <a:pPr algn="ctr">
+              <a:defRPr sz="1500" b="1">
+                <a:solidFill>
+                  <a:srgbClr val="1677C8"/>
+                </a:solidFill>
+                <a:latin typeface="Microsoft YaHei"/>
+                <a:ea typeface="Microsoft YaHei"/>
+                <a:cs typeface="Microsoft YaHei"/>
+              </a:defRPr>
+            </a:pPr>
+            <a:r>
+              <a:rPr sz="1500" b="1">
+                <a:solidFill>
+                  <a:srgbClr val="1677C8"/>
+                </a:solidFill>
+                <a:latin typeface="Microsoft YaHei"/>
+                <a:ea typeface="Microsoft YaHei"/>
+                <a:cs typeface="Microsoft YaHei"/>
+              </a:rPr>
+              <a:t>99.95%</a:t>
+            </a:r>
+          </a:p>
+        </p:txBody>
+      </p:sp>
+      <p:sp>
+        <p:nvSpPr>
+          <p:cNvPr id="43" name="">
+            <a:extLst xmlns:a="http://schemas.openxmlformats.org/drawingml/2006/main">
+              <a:ext uri="{FF2B5EF4-FFF2-40B4-BE49-F238E27FC236}">
+                <a16:creationId xmlns:a16="http://schemas.microsoft.com/office/drawing/2014/main" id="{ACC513E5-B763-40A8-9C65-E23C03F9DF2F}"/>
+              </a:ext>
+            </a:extLst>
+          </p:cNvPr>
+          <p:cNvSpPr>
+            <a:spLocks xmlns:a="http://schemas.openxmlformats.org/drawingml/2006/main" noGrp="1"/>
+          </p:cNvSpPr>
+          <p:nvPr/>
+        </p:nvSpPr>
+        <p:spPr>
+          <a:xfrm xmlns:a="http://schemas.openxmlformats.org/drawingml/2006/main">
+            <a:off x="8345729" y="3609975"/>
+            <a:ext cx="863041" cy="342900"/>
+          </a:xfrm>
+          <a:prstGeom xmlns:a="http://schemas.openxmlformats.org/drawingml/2006/main" prst="rect">
+            <a:avLst/>
+          </a:prstGeom>
+          <a:noFill xmlns:a="http://schemas.openxmlformats.org/drawingml/2006/main"/>
+          <a:ln xmlns:a="http://schemas.openxmlformats.org/drawingml/2006/main" w="0">
+            <a:noFill/>
+            <a:prstDash val="solid"/>
+          </a:ln>
+        </p:spPr>
+        <p:txBody>
+          <a:bodyPr xmlns:a="http://schemas.openxmlformats.org/drawingml/2006/main" lIns="0" tIns="0" rIns="0" bIns="0" anchor="ctr">
+            <a:normAutofit fontScale="100000"/>
+          </a:bodyPr>
+          <a:lstStyle xmlns:a="http://schemas.openxmlformats.org/drawingml/2006/main"/>
+          <a:p xmlns:a="http://schemas.openxmlformats.org/drawingml/2006/main">
+            <a:pPr algn="ctr">
+              <a:defRPr sz="1200" b="0">
+                <a:solidFill>
+                  <a:srgbClr val="475569"/>
+                </a:solidFill>
+                <a:latin typeface="Microsoft YaHei"/>
+                <a:ea typeface="Microsoft YaHei"/>
+                <a:cs typeface="Microsoft YaHei"/>
+              </a:defRPr>
+            </a:pPr>
+            <a:r>
+              <a:rPr sz="1200" b="0">
+                <a:solidFill>
+                  <a:srgbClr val="475569"/>
+                </a:solidFill>
+                <a:latin typeface="Microsoft YaHei"/>
+                <a:ea typeface="Microsoft YaHei"/>
+                <a:cs typeface="Microsoft YaHei"/>
+              </a:rPr>
+              <a:t>可用性</a:t>
+            </a:r>
+          </a:p>
+        </p:txBody>
+      </p:sp>
+      <p:sp>
+        <p:nvSpPr>
+          <p:cNvPr id="44" name="">
+            <a:extLst xmlns:a="http://schemas.openxmlformats.org/drawingml/2006/main">
+              <a:ext uri="{FF2B5EF4-FFF2-40B4-BE49-F238E27FC236}">
+                <a16:creationId xmlns:a16="http://schemas.microsoft.com/office/drawing/2014/main" id="{2801788E-BA29-45AC-8FCE-586038C366F9}"/>
+              </a:ext>
+            </a:extLst>
+          </p:cNvPr>
+          <p:cNvSpPr>
+            <a:spLocks xmlns:a="http://schemas.openxmlformats.org/drawingml/2006/main" noGrp="1"/>
+          </p:cNvSpPr>
+          <p:nvPr/>
+        </p:nvSpPr>
+        <p:spPr>
+          <a:xfrm xmlns:a="http://schemas.openxmlformats.org/drawingml/2006/main">
+            <a:off x="7444740" y="4095750"/>
+            <a:ext cx="1859280" cy="476250"/>
+          </a:xfrm>
+          <a:prstGeom xmlns:a="http://schemas.openxmlformats.org/drawingml/2006/main" prst="roundRect">
+            <a:avLst>
+              <a:gd name="adj" fmla="val 24000"/>
+            </a:avLst>
+          </a:prstGeom>
+          <a:solidFill xmlns:a="http://schemas.openxmlformats.org/drawingml/2006/main">
+            <a:srgbClr val="FFFFFF"/>
+          </a:solidFill>
+          <a:ln xmlns:a="http://schemas.openxmlformats.org/drawingml/2006/main" w="9525">
+            <a:solidFill>
+              <a:srgbClr val="C7D8E7"/>
+            </a:solidFill>
+            <a:prstDash val="solid"/>
+          </a:ln>
+        </p:spPr>
+      </p:sp>
+      <p:sp>
+        <p:nvSpPr>
+          <p:cNvPr id="45" name="">
+            <a:extLst xmlns:a="http://schemas.openxmlformats.org/drawingml/2006/main">
+              <a:ext uri="{FF2B5EF4-FFF2-40B4-BE49-F238E27FC236}">
+                <a16:creationId xmlns:a16="http://schemas.microsoft.com/office/drawing/2014/main" id="{4A7B1222-147B-489B-86A9-0D368E2CED80}"/>
+              </a:ext>
+            </a:extLst>
+          </p:cNvPr>
+          <p:cNvSpPr>
+            <a:spLocks xmlns:a="http://schemas.openxmlformats.org/drawingml/2006/main" noGrp="1"/>
+          </p:cNvSpPr>
+          <p:nvPr/>
+        </p:nvSpPr>
+        <p:spPr>
+          <a:xfrm xmlns:a="http://schemas.openxmlformats.org/drawingml/2006/main">
+            <a:off x="7539990" y="4162425"/>
+            <a:ext cx="767639" cy="342900"/>
+          </a:xfrm>
+          <a:prstGeom xmlns:a="http://schemas.openxmlformats.org/drawingml/2006/main" prst="rect">
+            <a:avLst/>
+          </a:prstGeom>
+          <a:noFill xmlns:a="http://schemas.openxmlformats.org/drawingml/2006/main"/>
+          <a:ln xmlns:a="http://schemas.openxmlformats.org/drawingml/2006/main" w="0">
+            <a:noFill/>
+            <a:prstDash val="solid"/>
+          </a:ln>
+        </p:spPr>
+        <p:txBody>
+          <a:bodyPr xmlns:a="http://schemas.openxmlformats.org/drawingml/2006/main" lIns="0" tIns="0" rIns="0" bIns="0" anchor="ctr">
+            <a:normAutofit fontScale="100000"/>
+          </a:bodyPr>
+          <a:lstStyle xmlns:a="http://schemas.openxmlformats.org/drawingml/2006/main"/>
+          <a:p xmlns:a="http://schemas.openxmlformats.org/drawingml/2006/main">
+            <a:pPr algn="ctr">
+              <a:defRPr sz="1500" b="1">
+                <a:solidFill>
+                  <a:srgbClr val="1677C8"/>
+                </a:solidFill>
+                <a:latin typeface="Microsoft YaHei"/>
+                <a:ea typeface="Microsoft YaHei"/>
+                <a:cs typeface="Microsoft YaHei"/>
+              </a:defRPr>
+            </a:pPr>
+            <a:r>
+              <a:rPr sz="1500" b="1">
+                <a:solidFill>
+                  <a:srgbClr val="1677C8"/>
+                </a:solidFill>
+                <a:latin typeface="Microsoft YaHei"/>
+                <a:ea typeface="Microsoft YaHei"/>
+                <a:cs typeface="Microsoft YaHei"/>
+              </a:rPr>
+              <a:t>21天</a:t>
+            </a:r>
+          </a:p>
+        </p:txBody>
+      </p:sp>
+      <p:sp>
+        <p:nvSpPr>
+          <p:cNvPr id="46" name="">
+            <a:extLst xmlns:a="http://schemas.openxmlformats.org/drawingml/2006/main">
+              <a:ext uri="{FF2B5EF4-FFF2-40B4-BE49-F238E27FC236}">
+                <a16:creationId xmlns:a16="http://schemas.microsoft.com/office/drawing/2014/main" id="{0E5D65DB-AAF8-4E90-9E19-254A145350D2}"/>
+              </a:ext>
+            </a:extLst>
+          </p:cNvPr>
+          <p:cNvSpPr>
+            <a:spLocks xmlns:a="http://schemas.openxmlformats.org/drawingml/2006/main" noGrp="1"/>
+          </p:cNvSpPr>
+          <p:nvPr/>
+        </p:nvSpPr>
+        <p:spPr>
+          <a:xfrm xmlns:a="http://schemas.openxmlformats.org/drawingml/2006/main">
+            <a:off x="8345729" y="4162425"/>
+            <a:ext cx="863041" cy="342900"/>
+          </a:xfrm>
+          <a:prstGeom xmlns:a="http://schemas.openxmlformats.org/drawingml/2006/main" prst="rect">
+            <a:avLst/>
+          </a:prstGeom>
+          <a:noFill xmlns:a="http://schemas.openxmlformats.org/drawingml/2006/main"/>
+          <a:ln xmlns:a="http://schemas.openxmlformats.org/drawingml/2006/main" w="0">
+            <a:noFill/>
+            <a:prstDash val="solid"/>
+          </a:ln>
+        </p:spPr>
+        <p:txBody>
+          <a:bodyPr xmlns:a="http://schemas.openxmlformats.org/drawingml/2006/main" lIns="0" tIns="0" rIns="0" bIns="0" anchor="ctr">
+            <a:normAutofit fontScale="100000"/>
+          </a:bodyPr>
+          <a:lstStyle xmlns:a="http://schemas.openxmlformats.org/drawingml/2006/main"/>
+          <a:p xmlns:a="http://schemas.openxmlformats.org/drawingml/2006/main">
+            <a:pPr algn="ctr">
+              <a:defRPr sz="1200" b="0">
+                <a:solidFill>
+                  <a:srgbClr val="475569"/>
+                </a:solidFill>
+                <a:latin typeface="Microsoft YaHei"/>
+                <a:ea typeface="Microsoft YaHei"/>
+                <a:cs typeface="Microsoft YaHei"/>
+              </a:defRPr>
+            </a:pPr>
+            <a:r>
+              <a:rPr sz="1200" b="0">
+                <a:solidFill>
+                  <a:srgbClr val="475569"/>
+                </a:solidFill>
+                <a:latin typeface="Microsoft YaHei"/>
+                <a:ea typeface="Microsoft YaHei"/>
+                <a:cs typeface="Microsoft YaHei"/>
+              </a:rPr>
+              <a:t>交付周期</a:t>
+            </a:r>
+          </a:p>
+        </p:txBody>
+      </p:sp>
+      <p:sp>
+        <p:nvSpPr>
+          <p:cNvPr id="47" name="">
+            <a:extLst xmlns:a="http://schemas.openxmlformats.org/drawingml/2006/main">
+              <a:ext uri="{FF2B5EF4-FFF2-40B4-BE49-F238E27FC236}">
+                <a16:creationId xmlns:a16="http://schemas.microsoft.com/office/drawing/2014/main" id="{6A963D1E-966A-4CFC-AEB5-39C6F7AEA8D5}"/>
+              </a:ext>
+            </a:extLst>
+          </p:cNvPr>
+          <p:cNvSpPr>
+            <a:spLocks xmlns:a="http://schemas.openxmlformats.org/drawingml/2006/main" noGrp="1"/>
+          </p:cNvSpPr>
+          <p:nvPr/>
+        </p:nvSpPr>
+        <p:spPr>
+          <a:xfrm xmlns:a="http://schemas.openxmlformats.org/drawingml/2006/main">
+            <a:off x="7292340" y="5200650"/>
+            <a:ext cx="2164080" cy="419100"/>
+          </a:xfrm>
+          <a:prstGeom xmlns:a="http://schemas.openxmlformats.org/drawingml/2006/main" prst="chevron">
+            <a:avLst/>
+          </a:prstGeom>
+          <a:solidFill xmlns:a="http://schemas.openxmlformats.org/drawingml/2006/main">
+            <a:srgbClr val="567AB8"/>
+          </a:solidFill>
+          <a:ln xmlns:a="http://schemas.openxmlformats.org/drawingml/2006/main" w="9525">
+            <a:solidFill>
+              <a:srgbClr val="FFFFFF"/>
+            </a:solidFill>
+            <a:prstDash val="solid"/>
+          </a:ln>
+        </p:spPr>
+        <p:txBody>
+          <a:bodyPr xmlns:a="http://schemas.openxmlformats.org/drawingml/2006/main" lIns="95250" tIns="19050" rIns="133350" bIns="19050" anchor="ctr">
+            <a:normAutofit fontScale="100000"/>
+          </a:bodyPr>
+          <a:lstStyle xmlns:a="http://schemas.openxmlformats.org/drawingml/2006/main"/>
+          <a:p xmlns:a="http://schemas.openxmlformats.org/drawingml/2006/main">
+            <a:pPr algn="ctr">
+              <a:defRPr sz="1200" b="1">
+                <a:solidFill>
+                  <a:srgbClr val="FFFFFF"/>
+                </a:solidFill>
+                <a:latin typeface="Microsoft YaHei"/>
+                <a:ea typeface="Microsoft YaHei"/>
+                <a:cs typeface="Microsoft YaHei"/>
+              </a:defRPr>
+            </a:pPr>
+            <a:r>
+              <a:rPr sz="1200" b="1">
+                <a:solidFill>
+                  <a:srgbClr val="FFFFFF"/>
+                </a:solidFill>
+                <a:latin typeface="Microsoft YaHei"/>
+                <a:ea typeface="Microsoft YaHei"/>
+                <a:cs typeface="Microsoft YaHei"/>
+              </a:rPr>
+              <a:t>提高产品稳定</a:t>
+            </a:r>
+          </a:p>
+        </p:txBody>
+      </p:sp>
+      <p:sp>
+        <p:nvSpPr>
+          <p:cNvPr id="48" name="PPAGENT_CONNECTOR|from=goal-kpi-goal|fromSide=bottom|to=goal-kpi-column-4|toSide=top">
+            <a:extLst xmlns:a="http://schemas.openxmlformats.org/drawingml/2006/main">
+              <a:ext uri="{FF2B5EF4-FFF2-40B4-BE49-F238E27FC236}">
+                <a16:creationId xmlns:a16="http://schemas.microsoft.com/office/drawing/2014/main" id="{2150562F-85E2-4C7C-9E41-E4F4911A9620}"/>
+              </a:ext>
+            </a:extLst>
+          </p:cNvPr>
+          <p:cNvSpPr>
+            <a:spLocks xmlns:a="http://schemas.openxmlformats.org/drawingml/2006/main" noGrp="1"/>
+          </p:cNvSpPr>
+          <p:nvPr/>
+        </p:nvSpPr>
+        <p:spPr>
+          <a:xfrm xmlns:a="http://schemas.openxmlformats.org/drawingml/2006/main" flipH="0" flipV="0">
+            <a:off x="6096000" y="1847850"/>
+            <a:ext cx="4556760" cy="342900"/>
+          </a:xfrm>
+          <a:prstGeom xmlns:a="http://schemas.openxmlformats.org/drawingml/2006/main" prst="line">
+            <a:avLst/>
+          </a:prstGeom>
+          <a:noFill xmlns:a="http://schemas.openxmlformats.org/drawingml/2006/main"/>
           <a:ln xmlns:a="http://schemas.openxmlformats.org/drawingml/2006/main" w="19050">
             <a:solidFill>
-              <a:srgbClr val="00A8D8"/>
+              <a:srgbClr val="6483BB"/>
+            </a:solidFill>
+            <a:prstDash val="solid"/>
+          </a:ln>
+        </p:spPr>
+      </p:sp>
+      <p:sp>
+        <p:nvSpPr>
+          <p:cNvPr id="49" name="PPAGENT_QA|parent=goal-kpi-column-4|domains=goal-kpi-columns">
+            <a:extLst xmlns:a="http://schemas.openxmlformats.org/drawingml/2006/main">
+              <a:ext uri="{FF2B5EF4-FFF2-40B4-BE49-F238E27FC236}">
+                <a16:creationId xmlns:a16="http://schemas.microsoft.com/office/drawing/2014/main" id="{0103AE07-E8F7-473D-96C9-60C9CBE49EEE}"/>
+              </a:ext>
+            </a:extLst>
+          </p:cNvPr>
+          <p:cNvSpPr>
+            <a:spLocks xmlns:a="http://schemas.openxmlformats.org/drawingml/2006/main" noGrp="1"/>
+          </p:cNvSpPr>
+          <p:nvPr/>
+        </p:nvSpPr>
+        <p:spPr>
+          <a:xfrm xmlns:a="http://schemas.openxmlformats.org/drawingml/2006/main">
+            <a:off x="9570720" y="2190750"/>
+            <a:ext cx="2164080" cy="3429000"/>
+          </a:xfrm>
+          <a:prstGeom xmlns:a="http://schemas.openxmlformats.org/drawingml/2006/main" prst="roundRect">
+            <a:avLst>
+              <a:gd name="adj" fmla="val 5282"/>
+            </a:avLst>
+          </a:prstGeom>
+          <a:solidFill xmlns:a="http://schemas.openxmlformats.org/drawingml/2006/main">
+            <a:srgbClr val="F7FAFC"/>
+          </a:solidFill>
+          <a:ln xmlns:a="http://schemas.openxmlformats.org/drawingml/2006/main" w="9525">
+            <a:solidFill>
+              <a:srgbClr val="D8E3ED"/>
             </a:solidFill>
             <a:prstDash val="solid"/>
           </a:ln>
@@ -1913,16 +3623,556 @@
           <a:effectRef xmlns:a="http://schemas.openxmlformats.org/drawingml/2006/main" idx="4"/>
           <a:fontRef xmlns:a="http://schemas.openxmlformats.org/drawingml/2006/main" idx="major"/>
         </p:style>
+      </p:sp>
+      <p:sp>
+        <p:nvSpPr>
+          <p:cNvPr id="50" name="">
+            <a:extLst xmlns:a="http://schemas.openxmlformats.org/drawingml/2006/main">
+              <a:ext uri="{FF2B5EF4-FFF2-40B4-BE49-F238E27FC236}">
+                <a16:creationId xmlns:a16="http://schemas.microsoft.com/office/drawing/2014/main" id="{DB5FEA1B-3AE3-477F-BFE7-FCEBCF25523A}"/>
+              </a:ext>
+            </a:extLst>
+          </p:cNvPr>
+          <p:cNvSpPr>
+            <a:spLocks xmlns:a="http://schemas.openxmlformats.org/drawingml/2006/main" noGrp="1"/>
+          </p:cNvSpPr>
+          <p:nvPr/>
+        </p:nvSpPr>
+        <p:spPr>
+          <a:xfrm xmlns:a="http://schemas.openxmlformats.org/drawingml/2006/main">
+            <a:off x="9570720" y="2190750"/>
+            <a:ext cx="2164080" cy="495300"/>
+          </a:xfrm>
+          <a:prstGeom xmlns:a="http://schemas.openxmlformats.org/drawingml/2006/main" prst="roundRect">
+            <a:avLst>
+              <a:gd name="adj" fmla="val 23077"/>
+            </a:avLst>
+          </a:prstGeom>
+          <a:solidFill xmlns:a="http://schemas.openxmlformats.org/drawingml/2006/main">
+            <a:srgbClr val="00A8D8"/>
+          </a:solidFill>
+          <a:ln xmlns:a="http://schemas.openxmlformats.org/drawingml/2006/main" w="0">
+            <a:noFill/>
+            <a:prstDash val="solid"/>
+          </a:ln>
+        </p:spPr>
         <p:txBody>
           <a:bodyPr xmlns:a="http://schemas.openxmlformats.org/drawingml/2006/main" lIns="114300" tIns="76200" rIns="114300" bIns="76200" anchor="ctr">
-            <a:normAutofit fontScale="97573"/>
+            <a:normAutofit fontScale="100000"/>
+          </a:bodyPr>
+          <a:lstStyle xmlns:a="http://schemas.openxmlformats.org/drawingml/2006/main"/>
+          <a:p xmlns:a="http://schemas.openxmlformats.org/drawingml/2006/main">
+            <a:pPr algn="ctr">
+              <a:defRPr sz="1350" b="1">
+                <a:solidFill>
+                  <a:srgbClr val="FFFFFF"/>
+                </a:solidFill>
+                <a:latin typeface="Microsoft YaHei"/>
+                <a:ea typeface="Microsoft YaHei"/>
+                <a:cs typeface="Microsoft YaHei"/>
+              </a:defRPr>
+            </a:pPr>
+            <a:r>
+              <a:rPr sz="1350" b="1">
+                <a:solidFill>
+                  <a:srgbClr val="FFFFFF"/>
+                </a:solidFill>
+                <a:latin typeface="Microsoft YaHei"/>
+                <a:ea typeface="Microsoft YaHei"/>
+                <a:cs typeface="Microsoft YaHei"/>
+              </a:rPr>
+              <a:t>商业合作</a:t>
+            </a:r>
+          </a:p>
+        </p:txBody>
+      </p:sp>
+      <p:sp>
+        <p:nvSpPr>
+          <p:cNvPr id="51" name="">
+            <a:extLst xmlns:a="http://schemas.openxmlformats.org/drawingml/2006/main">
+              <a:ext uri="{FF2B5EF4-FFF2-40B4-BE49-F238E27FC236}">
+                <a16:creationId xmlns:a16="http://schemas.microsoft.com/office/drawing/2014/main" id="{437E067F-443B-4453-80C4-8AEC328706C7}"/>
+              </a:ext>
+            </a:extLst>
+          </p:cNvPr>
+          <p:cNvSpPr>
+            <a:spLocks xmlns:a="http://schemas.openxmlformats.org/drawingml/2006/main" noGrp="1"/>
+          </p:cNvSpPr>
+          <p:nvPr/>
+        </p:nvSpPr>
+        <p:spPr>
+          <a:xfrm xmlns:a="http://schemas.openxmlformats.org/drawingml/2006/main">
+            <a:off x="9723120" y="2819400"/>
+            <a:ext cx="1859280" cy="590550"/>
+          </a:xfrm>
+          <a:prstGeom xmlns:a="http://schemas.openxmlformats.org/drawingml/2006/main" prst="rect">
+            <a:avLst/>
+          </a:prstGeom>
+          <a:noFill xmlns:a="http://schemas.openxmlformats.org/drawingml/2006/main"/>
+          <a:ln xmlns:a="http://schemas.openxmlformats.org/drawingml/2006/main" w="0">
+            <a:noFill/>
+            <a:prstDash val="solid"/>
+          </a:ln>
+        </p:spPr>
+        <p:txBody>
+          <a:bodyPr xmlns:a="http://schemas.openxmlformats.org/drawingml/2006/main" lIns="0" tIns="0" rIns="0" bIns="0" anchor="t">
+            <a:normAutofit fontScale="100000"/>
+          </a:bodyPr>
+          <a:lstStyle xmlns:a="http://schemas.openxmlformats.org/drawingml/2006/main"/>
+          <a:p xmlns:a="http://schemas.openxmlformats.org/drawingml/2006/main">
+            <a:pPr algn="ctr">
+              <a:defRPr sz="1200" b="0">
+                <a:solidFill>
+                  <a:srgbClr val="475569"/>
+                </a:solidFill>
+                <a:latin typeface="Microsoft YaHei"/>
+                <a:ea typeface="Microsoft YaHei"/>
+                <a:cs typeface="Microsoft YaHei"/>
+              </a:defRPr>
+            </a:pPr>
+            <a:r>
+              <a:rPr sz="1200" b="0">
+                <a:solidFill>
+                  <a:srgbClr val="475569"/>
+                </a:solidFill>
+                <a:latin typeface="Microsoft YaHei"/>
+                <a:ea typeface="Microsoft YaHei"/>
+                <a:cs typeface="Microsoft YaHei"/>
+              </a:rPr>
+              <a:t>拓展优质伙伴</a:t>
+            </a:r>
+          </a:p>
+          <a:p xmlns:a="http://schemas.openxmlformats.org/drawingml/2006/main">
+            <a:pPr algn="ctr">
+              <a:defRPr sz="1200" b="0">
+                <a:solidFill>
+                  <a:srgbClr val="475569"/>
+                </a:solidFill>
+                <a:latin typeface="Microsoft YaHei"/>
+                <a:ea typeface="Microsoft YaHei"/>
+                <a:cs typeface="Microsoft YaHei"/>
+              </a:defRPr>
+            </a:pPr>
+            <a:r>
+              <a:rPr sz="1200" b="0">
+                <a:solidFill>
+                  <a:srgbClr val="475569"/>
+                </a:solidFill>
+                <a:latin typeface="Microsoft YaHei"/>
+                <a:ea typeface="Microsoft YaHei"/>
+                <a:cs typeface="Microsoft YaHei"/>
+              </a:rPr>
+              <a:t>并提高合作质量</a:t>
+            </a:r>
+          </a:p>
+        </p:txBody>
+      </p:sp>
+      <p:sp>
+        <p:nvSpPr>
+          <p:cNvPr id="52" name="">
+            <a:extLst xmlns:a="http://schemas.openxmlformats.org/drawingml/2006/main">
+              <a:ext uri="{FF2B5EF4-FFF2-40B4-BE49-F238E27FC236}">
+                <a16:creationId xmlns:a16="http://schemas.microsoft.com/office/drawing/2014/main" id="{6E34A57A-E6B6-43C1-80DB-D0A4777DD8CF}"/>
+              </a:ext>
+            </a:extLst>
+          </p:cNvPr>
+          <p:cNvSpPr>
+            <a:spLocks xmlns:a="http://schemas.openxmlformats.org/drawingml/2006/main" noGrp="1"/>
+          </p:cNvSpPr>
+          <p:nvPr/>
+        </p:nvSpPr>
+        <p:spPr>
+          <a:xfrm xmlns:a="http://schemas.openxmlformats.org/drawingml/2006/main">
+            <a:off x="9723120" y="3543300"/>
+            <a:ext cx="1859280" cy="476250"/>
+          </a:xfrm>
+          <a:prstGeom xmlns:a="http://schemas.openxmlformats.org/drawingml/2006/main" prst="roundRect">
+            <a:avLst>
+              <a:gd name="adj" fmla="val 24000"/>
+            </a:avLst>
+          </a:prstGeom>
+          <a:solidFill xmlns:a="http://schemas.openxmlformats.org/drawingml/2006/main">
+            <a:srgbClr val="FFFFFF"/>
+          </a:solidFill>
+          <a:ln xmlns:a="http://schemas.openxmlformats.org/drawingml/2006/main" w="9525">
+            <a:solidFill>
+              <a:srgbClr val="C7D8E7"/>
+            </a:solidFill>
+            <a:prstDash val="solid"/>
+          </a:ln>
+        </p:spPr>
+      </p:sp>
+      <p:sp>
+        <p:nvSpPr>
+          <p:cNvPr id="53" name="">
+            <a:extLst xmlns:a="http://schemas.openxmlformats.org/drawingml/2006/main">
+              <a:ext uri="{FF2B5EF4-FFF2-40B4-BE49-F238E27FC236}">
+                <a16:creationId xmlns:a16="http://schemas.microsoft.com/office/drawing/2014/main" id="{CD5F6705-1A6B-402B-81AA-49DD36B8B864}"/>
+              </a:ext>
+            </a:extLst>
+          </p:cNvPr>
+          <p:cNvSpPr>
+            <a:spLocks xmlns:a="http://schemas.openxmlformats.org/drawingml/2006/main" noGrp="1"/>
+          </p:cNvSpPr>
+          <p:nvPr/>
+        </p:nvSpPr>
+        <p:spPr>
+          <a:xfrm xmlns:a="http://schemas.openxmlformats.org/drawingml/2006/main">
+            <a:off x="9818370" y="3609975"/>
+            <a:ext cx="767639" cy="342900"/>
+          </a:xfrm>
+          <a:prstGeom xmlns:a="http://schemas.openxmlformats.org/drawingml/2006/main" prst="rect">
+            <a:avLst/>
+          </a:prstGeom>
+          <a:noFill xmlns:a="http://schemas.openxmlformats.org/drawingml/2006/main"/>
+          <a:ln xmlns:a="http://schemas.openxmlformats.org/drawingml/2006/main" w="0">
+            <a:noFill/>
+            <a:prstDash val="solid"/>
+          </a:ln>
+        </p:spPr>
+        <p:txBody>
+          <a:bodyPr xmlns:a="http://schemas.openxmlformats.org/drawingml/2006/main" lIns="0" tIns="0" rIns="0" bIns="0" anchor="ctr">
+            <a:normAutofit fontScale="100000"/>
+          </a:bodyPr>
+          <a:lstStyle xmlns:a="http://schemas.openxmlformats.org/drawingml/2006/main"/>
+          <a:p xmlns:a="http://schemas.openxmlformats.org/drawingml/2006/main">
+            <a:pPr algn="ctr">
+              <a:defRPr sz="1500" b="1">
+                <a:solidFill>
+                  <a:srgbClr val="1677C8"/>
+                </a:solidFill>
+                <a:latin typeface="Microsoft YaHei"/>
+                <a:ea typeface="Microsoft YaHei"/>
+                <a:cs typeface="Microsoft YaHei"/>
+              </a:defRPr>
+            </a:pPr>
+            <a:r>
+              <a:rPr sz="1500" b="1">
+                <a:solidFill>
+                  <a:srgbClr val="1677C8"/>
+                </a:solidFill>
+                <a:latin typeface="Microsoft YaHei"/>
+                <a:ea typeface="Microsoft YaHei"/>
+                <a:cs typeface="Microsoft YaHei"/>
+              </a:rPr>
+              <a:t>220个</a:t>
+            </a:r>
+          </a:p>
+        </p:txBody>
+      </p:sp>
+      <p:sp>
+        <p:nvSpPr>
+          <p:cNvPr id="54" name="">
+            <a:extLst xmlns:a="http://schemas.openxmlformats.org/drawingml/2006/main">
+              <a:ext uri="{FF2B5EF4-FFF2-40B4-BE49-F238E27FC236}">
+                <a16:creationId xmlns:a16="http://schemas.microsoft.com/office/drawing/2014/main" id="{20F15A7F-9DAE-4E0D-8FA7-325BD60E356F}"/>
+              </a:ext>
+            </a:extLst>
+          </p:cNvPr>
+          <p:cNvSpPr>
+            <a:spLocks xmlns:a="http://schemas.openxmlformats.org/drawingml/2006/main" noGrp="1"/>
+          </p:cNvSpPr>
+          <p:nvPr/>
+        </p:nvSpPr>
+        <p:spPr>
+          <a:xfrm xmlns:a="http://schemas.openxmlformats.org/drawingml/2006/main">
+            <a:off x="10624109" y="3609975"/>
+            <a:ext cx="863041" cy="342900"/>
+          </a:xfrm>
+          <a:prstGeom xmlns:a="http://schemas.openxmlformats.org/drawingml/2006/main" prst="rect">
+            <a:avLst/>
+          </a:prstGeom>
+          <a:noFill xmlns:a="http://schemas.openxmlformats.org/drawingml/2006/main"/>
+          <a:ln xmlns:a="http://schemas.openxmlformats.org/drawingml/2006/main" w="0">
+            <a:noFill/>
+            <a:prstDash val="solid"/>
+          </a:ln>
+        </p:spPr>
+        <p:txBody>
+          <a:bodyPr xmlns:a="http://schemas.openxmlformats.org/drawingml/2006/main" lIns="0" tIns="0" rIns="0" bIns="0" anchor="ctr">
+            <a:normAutofit fontScale="100000"/>
+          </a:bodyPr>
+          <a:lstStyle xmlns:a="http://schemas.openxmlformats.org/drawingml/2006/main"/>
+          <a:p xmlns:a="http://schemas.openxmlformats.org/drawingml/2006/main">
+            <a:pPr algn="ctr">
+              <a:defRPr sz="1200" b="0">
+                <a:solidFill>
+                  <a:srgbClr val="475569"/>
+                </a:solidFill>
+                <a:latin typeface="Microsoft YaHei"/>
+                <a:ea typeface="Microsoft YaHei"/>
+                <a:cs typeface="Microsoft YaHei"/>
+              </a:defRPr>
+            </a:pPr>
+            <a:r>
+              <a:rPr sz="1200" b="0">
+                <a:solidFill>
+                  <a:srgbClr val="475569"/>
+                </a:solidFill>
+                <a:latin typeface="Microsoft YaHei"/>
+                <a:ea typeface="Microsoft YaHei"/>
+                <a:cs typeface="Microsoft YaHei"/>
+              </a:rPr>
+              <a:t>合作伙伴</a:t>
+            </a:r>
+          </a:p>
+        </p:txBody>
+      </p:sp>
+      <p:sp>
+        <p:nvSpPr>
+          <p:cNvPr id="55" name="">
+            <a:extLst xmlns:a="http://schemas.openxmlformats.org/drawingml/2006/main">
+              <a:ext uri="{FF2B5EF4-FFF2-40B4-BE49-F238E27FC236}">
+                <a16:creationId xmlns:a16="http://schemas.microsoft.com/office/drawing/2014/main" id="{EA74C225-2695-4158-A3A3-E9331170B740}"/>
+              </a:ext>
+            </a:extLst>
+          </p:cNvPr>
+          <p:cNvSpPr>
+            <a:spLocks xmlns:a="http://schemas.openxmlformats.org/drawingml/2006/main" noGrp="1"/>
+          </p:cNvSpPr>
+          <p:nvPr/>
+        </p:nvSpPr>
+        <p:spPr>
+          <a:xfrm xmlns:a="http://schemas.openxmlformats.org/drawingml/2006/main">
+            <a:off x="9723120" y="4095750"/>
+            <a:ext cx="1859280" cy="476250"/>
+          </a:xfrm>
+          <a:prstGeom xmlns:a="http://schemas.openxmlformats.org/drawingml/2006/main" prst="roundRect">
+            <a:avLst>
+              <a:gd name="adj" fmla="val 24000"/>
+            </a:avLst>
+          </a:prstGeom>
+          <a:solidFill xmlns:a="http://schemas.openxmlformats.org/drawingml/2006/main">
+            <a:srgbClr val="FFFFFF"/>
+          </a:solidFill>
+          <a:ln xmlns:a="http://schemas.openxmlformats.org/drawingml/2006/main" w="9525">
+            <a:solidFill>
+              <a:srgbClr val="C7D8E7"/>
+            </a:solidFill>
+            <a:prstDash val="solid"/>
+          </a:ln>
+        </p:spPr>
+      </p:sp>
+      <p:sp>
+        <p:nvSpPr>
+          <p:cNvPr id="56" name="">
+            <a:extLst xmlns:a="http://schemas.openxmlformats.org/drawingml/2006/main">
+              <a:ext uri="{FF2B5EF4-FFF2-40B4-BE49-F238E27FC236}">
+                <a16:creationId xmlns:a16="http://schemas.microsoft.com/office/drawing/2014/main" id="{CA3EA251-6E10-4369-9B6E-033913F239D0}"/>
+              </a:ext>
+            </a:extLst>
+          </p:cNvPr>
+          <p:cNvSpPr>
+            <a:spLocks xmlns:a="http://schemas.openxmlformats.org/drawingml/2006/main" noGrp="1"/>
+          </p:cNvSpPr>
+          <p:nvPr/>
+        </p:nvSpPr>
+        <p:spPr>
+          <a:xfrm xmlns:a="http://schemas.openxmlformats.org/drawingml/2006/main">
+            <a:off x="9818370" y="4162425"/>
+            <a:ext cx="767639" cy="342900"/>
+          </a:xfrm>
+          <a:prstGeom xmlns:a="http://schemas.openxmlformats.org/drawingml/2006/main" prst="rect">
+            <a:avLst/>
+          </a:prstGeom>
+          <a:noFill xmlns:a="http://schemas.openxmlformats.org/drawingml/2006/main"/>
+          <a:ln xmlns:a="http://schemas.openxmlformats.org/drawingml/2006/main" w="0">
+            <a:noFill/>
+            <a:prstDash val="solid"/>
+          </a:ln>
+        </p:spPr>
+        <p:txBody>
+          <a:bodyPr xmlns:a="http://schemas.openxmlformats.org/drawingml/2006/main" lIns="0" tIns="0" rIns="0" bIns="0" anchor="ctr">
+            <a:normAutofit fontScale="100000"/>
+          </a:bodyPr>
+          <a:lstStyle xmlns:a="http://schemas.openxmlformats.org/drawingml/2006/main"/>
+          <a:p xmlns:a="http://schemas.openxmlformats.org/drawingml/2006/main">
+            <a:pPr algn="ctr">
+              <a:defRPr sz="1500" b="1">
+                <a:solidFill>
+                  <a:srgbClr val="1677C8"/>
+                </a:solidFill>
+                <a:latin typeface="Microsoft YaHei"/>
+                <a:ea typeface="Microsoft YaHei"/>
+                <a:cs typeface="Microsoft YaHei"/>
+              </a:defRPr>
+            </a:pPr>
+            <a:r>
+              <a:rPr sz="1500" b="1">
+                <a:solidFill>
+                  <a:srgbClr val="1677C8"/>
+                </a:solidFill>
+                <a:latin typeface="Microsoft YaHei"/>
+                <a:ea typeface="Microsoft YaHei"/>
+                <a:cs typeface="Microsoft YaHei"/>
+              </a:rPr>
+              <a:t>82%</a:t>
+            </a:r>
+          </a:p>
+        </p:txBody>
+      </p:sp>
+      <p:sp>
+        <p:nvSpPr>
+          <p:cNvPr id="57" name="">
+            <a:extLst xmlns:a="http://schemas.openxmlformats.org/drawingml/2006/main">
+              <a:ext uri="{FF2B5EF4-FFF2-40B4-BE49-F238E27FC236}">
+                <a16:creationId xmlns:a16="http://schemas.microsoft.com/office/drawing/2014/main" id="{4871A5A9-C0D0-4CE3-A8D2-5E4AC2311094}"/>
+              </a:ext>
+            </a:extLst>
+          </p:cNvPr>
+          <p:cNvSpPr>
+            <a:spLocks xmlns:a="http://schemas.openxmlformats.org/drawingml/2006/main" noGrp="1"/>
+          </p:cNvSpPr>
+          <p:nvPr/>
+        </p:nvSpPr>
+        <p:spPr>
+          <a:xfrm xmlns:a="http://schemas.openxmlformats.org/drawingml/2006/main">
+            <a:off x="10624109" y="4162425"/>
+            <a:ext cx="863041" cy="342900"/>
+          </a:xfrm>
+          <a:prstGeom xmlns:a="http://schemas.openxmlformats.org/drawingml/2006/main" prst="rect">
+            <a:avLst/>
+          </a:prstGeom>
+          <a:noFill xmlns:a="http://schemas.openxmlformats.org/drawingml/2006/main"/>
+          <a:ln xmlns:a="http://schemas.openxmlformats.org/drawingml/2006/main" w="0">
+            <a:noFill/>
+            <a:prstDash val="solid"/>
+          </a:ln>
+        </p:spPr>
+        <p:txBody>
+          <a:bodyPr xmlns:a="http://schemas.openxmlformats.org/drawingml/2006/main" lIns="0" tIns="0" rIns="0" bIns="0" anchor="ctr">
+            <a:normAutofit fontScale="100000"/>
+          </a:bodyPr>
+          <a:lstStyle xmlns:a="http://schemas.openxmlformats.org/drawingml/2006/main"/>
+          <a:p xmlns:a="http://schemas.openxmlformats.org/drawingml/2006/main">
+            <a:pPr algn="ctr">
+              <a:defRPr sz="1200" b="0">
+                <a:solidFill>
+                  <a:srgbClr val="475569"/>
+                </a:solidFill>
+                <a:latin typeface="Microsoft YaHei"/>
+                <a:ea typeface="Microsoft YaHei"/>
+                <a:cs typeface="Microsoft YaHei"/>
+              </a:defRPr>
+            </a:pPr>
+            <a:r>
+              <a:rPr sz="1200" b="0">
+                <a:solidFill>
+                  <a:srgbClr val="475569"/>
+                </a:solidFill>
+                <a:latin typeface="Microsoft YaHei"/>
+                <a:ea typeface="Microsoft YaHei"/>
+                <a:cs typeface="Microsoft YaHei"/>
+              </a:rPr>
+              <a:t>续约率</a:t>
+            </a:r>
+          </a:p>
+        </p:txBody>
+      </p:sp>
+      <p:sp>
+        <p:nvSpPr>
+          <p:cNvPr id="58" name="">
+            <a:extLst xmlns:a="http://schemas.openxmlformats.org/drawingml/2006/main">
+              <a:ext uri="{FF2B5EF4-FFF2-40B4-BE49-F238E27FC236}">
+                <a16:creationId xmlns:a16="http://schemas.microsoft.com/office/drawing/2014/main" id="{0FE15936-4E5F-4491-B03D-4FF20B6E06A3}"/>
+              </a:ext>
+            </a:extLst>
+          </p:cNvPr>
+          <p:cNvSpPr>
+            <a:spLocks xmlns:a="http://schemas.openxmlformats.org/drawingml/2006/main" noGrp="1"/>
+          </p:cNvSpPr>
+          <p:nvPr/>
+        </p:nvSpPr>
+        <p:spPr>
+          <a:xfrm xmlns:a="http://schemas.openxmlformats.org/drawingml/2006/main">
+            <a:off x="9570720" y="5200650"/>
+            <a:ext cx="2164080" cy="419100"/>
+          </a:xfrm>
+          <a:prstGeom xmlns:a="http://schemas.openxmlformats.org/drawingml/2006/main" prst="chevron">
+            <a:avLst/>
+          </a:prstGeom>
+          <a:solidFill xmlns:a="http://schemas.openxmlformats.org/drawingml/2006/main">
+            <a:srgbClr val="00A8D8"/>
+          </a:solidFill>
+          <a:ln xmlns:a="http://schemas.openxmlformats.org/drawingml/2006/main" w="9525">
+            <a:solidFill>
+              <a:srgbClr val="FFFFFF"/>
+            </a:solidFill>
+            <a:prstDash val="solid"/>
+          </a:ln>
+        </p:spPr>
+        <p:txBody>
+          <a:bodyPr xmlns:a="http://schemas.openxmlformats.org/drawingml/2006/main" lIns="95250" tIns="19050" rIns="133350" bIns="19050" anchor="ctr">
+            <a:normAutofit fontScale="100000"/>
+          </a:bodyPr>
+          <a:lstStyle xmlns:a="http://schemas.openxmlformats.org/drawingml/2006/main"/>
+          <a:p xmlns:a="http://schemas.openxmlformats.org/drawingml/2006/main">
+            <a:pPr algn="ctr">
+              <a:defRPr sz="1200" b="1">
+                <a:solidFill>
+                  <a:srgbClr val="FFFFFF"/>
+                </a:solidFill>
+                <a:latin typeface="Microsoft YaHei"/>
+                <a:ea typeface="Microsoft YaHei"/>
+                <a:cs typeface="Microsoft YaHei"/>
+              </a:defRPr>
+            </a:pPr>
+            <a:r>
+              <a:rPr sz="1200" b="1">
+                <a:solidFill>
+                  <a:srgbClr val="FFFFFF"/>
+                </a:solidFill>
+                <a:latin typeface="Microsoft YaHei"/>
+                <a:ea typeface="Microsoft YaHei"/>
+                <a:cs typeface="Microsoft YaHei"/>
+              </a:rPr>
+              <a:t>增强盈利能力</a:t>
+            </a:r>
+          </a:p>
+        </p:txBody>
+      </p:sp>
+      <p:sp>
+        <p:nvSpPr>
+          <p:cNvPr id="59" name="">
+            <a:extLst xmlns:a="http://schemas.openxmlformats.org/drawingml/2006/main">
+              <a:ext uri="{FF2B5EF4-FFF2-40B4-BE49-F238E27FC236}">
+                <a16:creationId xmlns:a16="http://schemas.microsoft.com/office/drawing/2014/main" id="{56438E97-9E00-492A-94BE-4E0B3B93FD26}"/>
+              </a:ext>
+            </a:extLst>
+          </p:cNvPr>
+          <p:cNvSpPr>
+            <a:spLocks xmlns:a="http://schemas.openxmlformats.org/drawingml/2006/main" noGrp="1"/>
+          </p:cNvSpPr>
+          <p:nvPr/>
+        </p:nvSpPr>
+        <p:spPr>
+          <a:xfrm xmlns:a="http://schemas.openxmlformats.org/drawingml/2006/main">
+            <a:off x="457200" y="5772150"/>
+            <a:ext cx="11277600" cy="419100"/>
+          </a:xfrm>
+          <a:prstGeom xmlns:a="http://schemas.openxmlformats.org/drawingml/2006/main" prst="roundRect">
+            <a:avLst>
+              <a:gd name="adj" fmla="val 27273"/>
+            </a:avLst>
+          </a:prstGeom>
+          <a:solidFill xmlns:a="http://schemas.openxmlformats.org/drawingml/2006/main">
+            <a:srgbClr val="173F68"/>
+          </a:solidFill>
+          <a:ln xmlns:a="http://schemas.openxmlformats.org/drawingml/2006/main" w="0">
+            <a:noFill/>
+            <a:prstDash val="solid"/>
+          </a:ln>
+        </p:spPr>
+        <p:txBody>
+          <a:bodyPr xmlns:a="http://schemas.openxmlformats.org/drawingml/2006/main" lIns="114300" tIns="76200" rIns="114300" bIns="76200" anchor="ctr">
+            <a:noAutofit/>
           </a:bodyPr>
           <a:lstStyle xmlns:a="http://schemas.openxmlformats.org/drawingml/2006/main"/>
           <a:p xmlns:a="http://schemas.openxmlformats.org/drawingml/2006/main">
             <a:pPr algn="ctr">
               <a:defRPr sz="1275" b="1">
                 <a:solidFill>
-                  <a:srgbClr val="00A8D8"/>
+                  <a:srgbClr val="FFFFFF"/>
                 </a:solidFill>
                 <a:latin typeface="Microsoft YaHei"/>
                 <a:ea typeface="Microsoft YaHei"/>
@@ -1932,491 +4182,13 @@
             <a:r>
               <a:rPr sz="1275" b="1">
                 <a:solidFill>
-                  <a:srgbClr val="00A8D8"/>
+                  <a:srgbClr val="FFFFFF"/>
                 </a:solidFill>
                 <a:latin typeface="Microsoft YaHei"/>
                 <a:ea typeface="Microsoft YaHei"/>
                 <a:cs typeface="Microsoft YaHei"/>
               </a:rPr>
-              <a:t>15%</a:t>
-            </a:r>
-          </a:p>
-          <a:p xmlns:a="http://schemas.openxmlformats.org/drawingml/2006/main">
-            <a:pPr algn="ctr">
-              <a:defRPr sz="1275" b="1">
-                <a:solidFill>
-                  <a:srgbClr val="00A8D8"/>
-                </a:solidFill>
-                <a:latin typeface="Microsoft YaHei"/>
-                <a:ea typeface="Microsoft YaHei"/>
-                <a:cs typeface="Microsoft YaHei"/>
-              </a:defRPr>
-            </a:pPr>
-            <a:r>
-              <a:rPr sz="1275" b="1">
-                <a:solidFill>
-                  <a:srgbClr val="00A8D8"/>
-                </a:solidFill>
-                <a:latin typeface="Microsoft YaHei"/>
-                <a:ea typeface="Microsoft YaHei"/>
-                <a:cs typeface="Microsoft YaHei"/>
-              </a:rPr>
-              <a:t>指标 B</a:t>
-            </a:r>
-          </a:p>
-        </p:txBody>
-      </p:sp>
-      <p:sp>
-        <p:nvSpPr>
-          <p:cNvPr id="14" name="">
-            <a:extLst xmlns:a="http://schemas.openxmlformats.org/drawingml/2006/main">
-              <a:ext uri="{FF2B5EF4-FFF2-40B4-BE49-F238E27FC236}">
-                <a16:creationId xmlns:a16="http://schemas.microsoft.com/office/drawing/2014/main" id="{CD51D6CE-AEE3-4C99-ABD1-DDE838520DD9}"/>
-              </a:ext>
-            </a:extLst>
-          </p:cNvPr>
-          <p:cNvSpPr>
-            <a:spLocks xmlns:a="http://schemas.openxmlformats.org/drawingml/2006/main" noGrp="1"/>
-          </p:cNvSpPr>
-          <p:nvPr/>
-        </p:nvSpPr>
-        <p:spPr>
-          <a:xfrm xmlns:a="http://schemas.openxmlformats.org/drawingml/2006/main">
-            <a:off x="2333625" y="4914900"/>
-            <a:ext cx="723900" cy="723900"/>
-          </a:xfrm>
-          <a:prstGeom xmlns:a="http://schemas.openxmlformats.org/drawingml/2006/main" prst="ellipse">
-            <a:avLst/>
-          </a:prstGeom>
-          <a:solidFill xmlns:a="http://schemas.openxmlformats.org/drawingml/2006/main">
-            <a:srgbClr val="14CBD1"/>
-          </a:solidFill>
-          <a:ln xmlns:a="http://schemas.openxmlformats.org/drawingml/2006/main" w="19050">
-            <a:solidFill>
-              <a:srgbClr val="FFFFFF"/>
-            </a:solidFill>
-            <a:prstDash val="solid"/>
-          </a:ln>
-        </p:spPr>
-        <p:style>
-          <a:lnRef xmlns:a="http://schemas.openxmlformats.org/drawingml/2006/main" idx="0"/>
-          <a:fillRef xmlns:a="http://schemas.openxmlformats.org/drawingml/2006/main" idx="0"/>
-          <a:effectRef xmlns:a="http://schemas.openxmlformats.org/drawingml/2006/main" idx="4"/>
-          <a:fontRef xmlns:a="http://schemas.openxmlformats.org/drawingml/2006/main" idx="major"/>
-        </p:style>
-        <p:txBody>
-          <a:bodyPr xmlns:a="http://schemas.openxmlformats.org/drawingml/2006/main" lIns="114300" tIns="76200" rIns="114300" bIns="76200" anchor="ctr">
-            <a:normAutofit fontScale="100000"/>
-          </a:bodyPr>
-          <a:lstStyle xmlns:a="http://schemas.openxmlformats.org/drawingml/2006/main"/>
-          <a:p xmlns:a="http://schemas.openxmlformats.org/drawingml/2006/main">
-            <a:pPr algn="ctr">
-              <a:defRPr sz="2100" b="1">
-                <a:solidFill>
-                  <a:srgbClr val="FFFFFF"/>
-                </a:solidFill>
-                <a:latin typeface="Microsoft YaHei"/>
-                <a:ea typeface="Microsoft YaHei"/>
-                <a:cs typeface="Microsoft YaHei"/>
-              </a:defRPr>
-            </a:pPr>
-            <a:r>
-              <a:rPr sz="2100" b="1">
-                <a:solidFill>
-                  <a:srgbClr val="FFFFFF"/>
-                </a:solidFill>
-                <a:latin typeface="Microsoft YaHei"/>
-                <a:ea typeface="Microsoft YaHei"/>
-                <a:cs typeface="Microsoft YaHei"/>
-              </a:rPr>
-              <a:t>✓</a:t>
-            </a:r>
-          </a:p>
-        </p:txBody>
-      </p:sp>
-      <p:sp>
-        <p:nvSpPr>
-          <p:cNvPr id="15" name="">
-            <a:extLst xmlns:a="http://schemas.openxmlformats.org/drawingml/2006/main">
-              <a:ext uri="{FF2B5EF4-FFF2-40B4-BE49-F238E27FC236}">
-                <a16:creationId xmlns:a16="http://schemas.microsoft.com/office/drawing/2014/main" id="{6CA1334D-C581-4217-86A9-2B4323EFDD29}"/>
-              </a:ext>
-            </a:extLst>
-          </p:cNvPr>
-          <p:cNvSpPr>
-            <a:spLocks xmlns:a="http://schemas.openxmlformats.org/drawingml/2006/main" noGrp="1"/>
-          </p:cNvSpPr>
-          <p:nvPr/>
-        </p:nvSpPr>
-        <p:spPr>
-          <a:xfrm xmlns:a="http://schemas.openxmlformats.org/drawingml/2006/main">
-            <a:off x="3333750" y="4667250"/>
-            <a:ext cx="2857500" cy="381000"/>
-          </a:xfrm>
-          <a:prstGeom xmlns:a="http://schemas.openxmlformats.org/drawingml/2006/main" prst="rect">
-            <a:avLst/>
-          </a:prstGeom>
-          <a:noFill xmlns:a="http://schemas.openxmlformats.org/drawingml/2006/main"/>
-          <a:ln xmlns:a="http://schemas.openxmlformats.org/drawingml/2006/main" w="0">
-            <a:noFill/>
-            <a:prstDash val="solid"/>
-          </a:ln>
-        </p:spPr>
-        <p:txBody>
-          <a:bodyPr xmlns:a="http://schemas.openxmlformats.org/drawingml/2006/main" lIns="0" tIns="0" rIns="0" bIns="0" anchor="ctr">
-            <a:normAutofit fontScale="100000"/>
-          </a:bodyPr>
-          <a:lstStyle xmlns:a="http://schemas.openxmlformats.org/drawingml/2006/main"/>
-          <a:p xmlns:a="http://schemas.openxmlformats.org/drawingml/2006/main">
-            <a:pPr algn="l">
-              <a:defRPr sz="1725" b="1">
-                <a:solidFill>
-                  <a:srgbClr val="1677C8"/>
-                </a:solidFill>
-                <a:latin typeface="Microsoft YaHei"/>
-                <a:ea typeface="Microsoft YaHei"/>
-                <a:cs typeface="Microsoft YaHei"/>
-              </a:defRPr>
-            </a:pPr>
-            <a:r>
-              <a:rPr sz="1725" b="1">
-                <a:solidFill>
-                  <a:srgbClr val="1677C8"/>
-                </a:solidFill>
-                <a:latin typeface="Microsoft YaHei"/>
-                <a:ea typeface="Microsoft YaHei"/>
-                <a:cs typeface="Microsoft YaHei"/>
-              </a:rPr>
-              <a:t>目标三</a:t>
-            </a:r>
-          </a:p>
-        </p:txBody>
-      </p:sp>
-      <p:sp>
-        <p:nvSpPr>
-          <p:cNvPr id="16" name="">
-            <a:extLst xmlns:a="http://schemas.openxmlformats.org/drawingml/2006/main">
-              <a:ext uri="{FF2B5EF4-FFF2-40B4-BE49-F238E27FC236}">
-                <a16:creationId xmlns:a16="http://schemas.microsoft.com/office/drawing/2014/main" id="{1C6D61C5-2212-457F-9B1D-ACDB60CE8C64}"/>
-              </a:ext>
-            </a:extLst>
-          </p:cNvPr>
-          <p:cNvSpPr>
-            <a:spLocks xmlns:a="http://schemas.openxmlformats.org/drawingml/2006/main" noGrp="1"/>
-          </p:cNvSpPr>
-          <p:nvPr/>
-        </p:nvSpPr>
-        <p:spPr>
-          <a:xfrm xmlns:a="http://schemas.openxmlformats.org/drawingml/2006/main">
-            <a:off x="3333750" y="5105400"/>
-            <a:ext cx="2857500" cy="723900"/>
-          </a:xfrm>
-          <a:prstGeom xmlns:a="http://schemas.openxmlformats.org/drawingml/2006/main" prst="rect">
-            <a:avLst/>
-          </a:prstGeom>
-          <a:noFill xmlns:a="http://schemas.openxmlformats.org/drawingml/2006/main"/>
-          <a:ln xmlns:a="http://schemas.openxmlformats.org/drawingml/2006/main" w="0">
-            <a:noFill/>
-            <a:prstDash val="solid"/>
-          </a:ln>
-        </p:spPr>
-        <p:txBody>
-          <a:bodyPr xmlns:a="http://schemas.openxmlformats.org/drawingml/2006/main" lIns="0" tIns="0" rIns="0" bIns="0" anchor="t">
-            <a:normAutofit fontScale="100000"/>
-          </a:bodyPr>
-          <a:lstStyle xmlns:a="http://schemas.openxmlformats.org/drawingml/2006/main"/>
-          <a:p xmlns:a="http://schemas.openxmlformats.org/drawingml/2006/main">
-            <a:pPr algn="l">
-              <a:defRPr sz="1200" b="0">
-                <a:solidFill>
-                  <a:srgbClr val="475569"/>
-                </a:solidFill>
-                <a:latin typeface="Microsoft YaHei"/>
-                <a:ea typeface="Microsoft YaHei"/>
-                <a:cs typeface="Microsoft YaHei"/>
-              </a:defRPr>
-            </a:pPr>
-            <a:r>
-              <a:rPr sz="1200" b="0">
-                <a:solidFill>
-                  <a:srgbClr val="475569"/>
-                </a:solidFill>
-                <a:latin typeface="Microsoft YaHei"/>
-                <a:ea typeface="Microsoft YaHei"/>
-                <a:cs typeface="Microsoft YaHei"/>
-              </a:rPr>
-              <a:t>说明目标及其完成情况</a:t>
-            </a:r>
-          </a:p>
-        </p:txBody>
-      </p:sp>
-      <p:sp>
-        <p:nvSpPr>
-          <p:cNvPr id="17" name="">
-            <a:extLst xmlns:a="http://schemas.openxmlformats.org/drawingml/2006/main">
-              <a:ext uri="{FF2B5EF4-FFF2-40B4-BE49-F238E27FC236}">
-                <a16:creationId xmlns:a16="http://schemas.microsoft.com/office/drawing/2014/main" id="{B09FBB9C-CBFE-4F8F-B3A8-3BDB6A36CB66}"/>
-              </a:ext>
-            </a:extLst>
-          </p:cNvPr>
-          <p:cNvSpPr>
-            <a:spLocks xmlns:a="http://schemas.openxmlformats.org/drawingml/2006/main" noGrp="1"/>
-          </p:cNvSpPr>
-          <p:nvPr/>
-        </p:nvSpPr>
-        <p:spPr>
-          <a:xfrm xmlns:a="http://schemas.openxmlformats.org/drawingml/2006/main">
-            <a:off x="6477000" y="4819650"/>
-            <a:ext cx="990600" cy="990600"/>
-          </a:xfrm>
-          <a:prstGeom xmlns:a="http://schemas.openxmlformats.org/drawingml/2006/main" prst="ellipse">
-            <a:avLst/>
-          </a:prstGeom>
-          <a:solidFill xmlns:a="http://schemas.openxmlformats.org/drawingml/2006/main">
-            <a:srgbClr val="FFFFFF"/>
-          </a:solidFill>
-          <a:ln xmlns:a="http://schemas.openxmlformats.org/drawingml/2006/main" w="19050">
-            <a:solidFill>
-              <a:srgbClr val="1677C8"/>
-            </a:solidFill>
-            <a:prstDash val="solid"/>
-          </a:ln>
-        </p:spPr>
-        <p:style>
-          <a:lnRef xmlns:a="http://schemas.openxmlformats.org/drawingml/2006/main" idx="0"/>
-          <a:fillRef xmlns:a="http://schemas.openxmlformats.org/drawingml/2006/main" idx="0"/>
-          <a:effectRef xmlns:a="http://schemas.openxmlformats.org/drawingml/2006/main" idx="4"/>
-          <a:fontRef xmlns:a="http://schemas.openxmlformats.org/drawingml/2006/main" idx="major"/>
-        </p:style>
-        <p:txBody>
-          <a:bodyPr xmlns:a="http://schemas.openxmlformats.org/drawingml/2006/main" lIns="114300" tIns="76200" rIns="114300" bIns="76200" anchor="ctr">
-            <a:normAutofit fontScale="95556"/>
-          </a:bodyPr>
-          <a:lstStyle xmlns:a="http://schemas.openxmlformats.org/drawingml/2006/main"/>
-          <a:p xmlns:a="http://schemas.openxmlformats.org/drawingml/2006/main">
-            <a:pPr algn="ctr">
-              <a:defRPr sz="1275" b="1">
-                <a:solidFill>
-                  <a:srgbClr val="1677C8"/>
-                </a:solidFill>
-                <a:latin typeface="Microsoft YaHei"/>
-                <a:ea typeface="Microsoft YaHei"/>
-                <a:cs typeface="Microsoft YaHei"/>
-              </a:defRPr>
-            </a:pPr>
-            <a:r>
-              <a:rPr sz="1275" b="1">
-                <a:solidFill>
-                  <a:srgbClr val="1677C8"/>
-                </a:solidFill>
-                <a:latin typeface="Microsoft YaHei"/>
-                <a:ea typeface="Microsoft YaHei"/>
-                <a:cs typeface="Microsoft YaHei"/>
-              </a:rPr>
-              <a:t>45天</a:t>
-            </a:r>
-          </a:p>
-          <a:p xmlns:a="http://schemas.openxmlformats.org/drawingml/2006/main">
-            <a:pPr algn="ctr">
-              <a:defRPr sz="1275" b="1">
-                <a:solidFill>
-                  <a:srgbClr val="1677C8"/>
-                </a:solidFill>
-                <a:latin typeface="Microsoft YaHei"/>
-                <a:ea typeface="Microsoft YaHei"/>
-                <a:cs typeface="Microsoft YaHei"/>
-              </a:defRPr>
-            </a:pPr>
-            <a:r>
-              <a:rPr sz="1275" b="1">
-                <a:solidFill>
-                  <a:srgbClr val="1677C8"/>
-                </a:solidFill>
-                <a:latin typeface="Microsoft YaHei"/>
-                <a:ea typeface="Microsoft YaHei"/>
-                <a:cs typeface="Microsoft YaHei"/>
-              </a:rPr>
-              <a:t>指标 A</a:t>
-            </a:r>
-          </a:p>
-        </p:txBody>
-      </p:sp>
-      <p:sp>
-        <p:nvSpPr>
-          <p:cNvPr id="18" name="">
-            <a:extLst xmlns:a="http://schemas.openxmlformats.org/drawingml/2006/main">
-              <a:ext uri="{FF2B5EF4-FFF2-40B4-BE49-F238E27FC236}">
-                <a16:creationId xmlns:a16="http://schemas.microsoft.com/office/drawing/2014/main" id="{CF4B2D73-A7F2-423F-A128-5E6D3777463F}"/>
-              </a:ext>
-            </a:extLst>
-          </p:cNvPr>
-          <p:cNvSpPr>
-            <a:spLocks xmlns:a="http://schemas.openxmlformats.org/drawingml/2006/main" noGrp="1"/>
-          </p:cNvSpPr>
-          <p:nvPr/>
-        </p:nvSpPr>
-        <p:spPr>
-          <a:xfrm xmlns:a="http://schemas.openxmlformats.org/drawingml/2006/main">
-            <a:off x="7677150" y="4819650"/>
-            <a:ext cx="990600" cy="990600"/>
-          </a:xfrm>
-          <a:prstGeom xmlns:a="http://schemas.openxmlformats.org/drawingml/2006/main" prst="ellipse">
-            <a:avLst/>
-          </a:prstGeom>
-          <a:solidFill xmlns:a="http://schemas.openxmlformats.org/drawingml/2006/main">
-            <a:srgbClr val="FFFFFF"/>
-          </a:solidFill>
-          <a:ln xmlns:a="http://schemas.openxmlformats.org/drawingml/2006/main" w="19050">
-            <a:solidFill>
-              <a:srgbClr val="1677C8"/>
-            </a:solidFill>
-            <a:prstDash val="solid"/>
-          </a:ln>
-        </p:spPr>
-        <p:style>
-          <a:lnRef xmlns:a="http://schemas.openxmlformats.org/drawingml/2006/main" idx="0"/>
-          <a:fillRef xmlns:a="http://schemas.openxmlformats.org/drawingml/2006/main" idx="0"/>
-          <a:effectRef xmlns:a="http://schemas.openxmlformats.org/drawingml/2006/main" idx="4"/>
-          <a:fontRef xmlns:a="http://schemas.openxmlformats.org/drawingml/2006/main" idx="major"/>
-        </p:style>
-        <p:txBody>
-          <a:bodyPr xmlns:a="http://schemas.openxmlformats.org/drawingml/2006/main" lIns="114300" tIns="76200" rIns="114300" bIns="76200" anchor="ctr">
-            <a:normAutofit fontScale="97573"/>
-          </a:bodyPr>
-          <a:lstStyle xmlns:a="http://schemas.openxmlformats.org/drawingml/2006/main"/>
-          <a:p xmlns:a="http://schemas.openxmlformats.org/drawingml/2006/main">
-            <a:pPr algn="ctr">
-              <a:defRPr sz="1275" b="1">
-                <a:solidFill>
-                  <a:srgbClr val="1677C8"/>
-                </a:solidFill>
-                <a:latin typeface="Microsoft YaHei"/>
-                <a:ea typeface="Microsoft YaHei"/>
-                <a:cs typeface="Microsoft YaHei"/>
-              </a:defRPr>
-            </a:pPr>
-            <a:r>
-              <a:rPr sz="1275" b="1">
-                <a:solidFill>
-                  <a:srgbClr val="1677C8"/>
-                </a:solidFill>
-                <a:latin typeface="Microsoft YaHei"/>
-                <a:ea typeface="Microsoft YaHei"/>
-                <a:cs typeface="Microsoft YaHei"/>
-              </a:rPr>
-              <a:t>25%</a:t>
-            </a:r>
-          </a:p>
-          <a:p xmlns:a="http://schemas.openxmlformats.org/drawingml/2006/main">
-            <a:pPr algn="ctr">
-              <a:defRPr sz="1275" b="1">
-                <a:solidFill>
-                  <a:srgbClr val="1677C8"/>
-                </a:solidFill>
-                <a:latin typeface="Microsoft YaHei"/>
-                <a:ea typeface="Microsoft YaHei"/>
-                <a:cs typeface="Microsoft YaHei"/>
-              </a:defRPr>
-            </a:pPr>
-            <a:r>
-              <a:rPr sz="1275" b="1">
-                <a:solidFill>
-                  <a:srgbClr val="1677C8"/>
-                </a:solidFill>
-                <a:latin typeface="Microsoft YaHei"/>
-                <a:ea typeface="Microsoft YaHei"/>
-                <a:cs typeface="Microsoft YaHei"/>
-              </a:rPr>
-              <a:t>指标 B</a:t>
-            </a:r>
-          </a:p>
-        </p:txBody>
-      </p:sp>
-      <p:sp>
-        <p:nvSpPr>
-          <p:cNvPr id="19" name="">
-            <a:extLst xmlns:a="http://schemas.openxmlformats.org/drawingml/2006/main">
-              <a:ext uri="{FF2B5EF4-FFF2-40B4-BE49-F238E27FC236}">
-                <a16:creationId xmlns:a16="http://schemas.microsoft.com/office/drawing/2014/main" id="{A7D21FA2-434E-450F-BF2D-7A11E513B733}"/>
-              </a:ext>
-            </a:extLst>
-          </p:cNvPr>
-          <p:cNvSpPr>
-            <a:spLocks xmlns:a="http://schemas.openxmlformats.org/drawingml/2006/main" noGrp="1"/>
-          </p:cNvSpPr>
-          <p:nvPr/>
-        </p:nvSpPr>
-        <p:spPr>
-          <a:xfrm xmlns:a="http://schemas.openxmlformats.org/drawingml/2006/main">
-            <a:off x="10001250" y="1666875"/>
-            <a:ext cx="1714500" cy="3714750"/>
-          </a:xfrm>
-          <a:prstGeom xmlns:a="http://schemas.openxmlformats.org/drawingml/2006/main" prst="upArrow">
-            <a:avLst/>
-          </a:prstGeom>
-          <a:solidFill xmlns:a="http://schemas.openxmlformats.org/drawingml/2006/main">
-            <a:srgbClr val="1677C8"/>
-          </a:solidFill>
-          <a:ln xmlns:a="http://schemas.openxmlformats.org/drawingml/2006/main" w="0">
-            <a:noFill/>
-            <a:prstDash val="solid"/>
-          </a:ln>
-        </p:spPr>
-        <p:style>
-          <a:lnRef xmlns:a="http://schemas.openxmlformats.org/drawingml/2006/main" idx="0"/>
-          <a:fillRef xmlns:a="http://schemas.openxmlformats.org/drawingml/2006/main" idx="0"/>
-          <a:effectRef xmlns:a="http://schemas.openxmlformats.org/drawingml/2006/main" idx="7"/>
-          <a:fontRef xmlns:a="http://schemas.openxmlformats.org/drawingml/2006/main" idx="major"/>
-        </p:style>
-        <p:txBody>
-          <a:bodyPr xmlns:a="http://schemas.openxmlformats.org/drawingml/2006/main" lIns="114300" tIns="76200" rIns="114300" bIns="76200" anchor="ctr">
-            <a:normAutofit fontScale="100000"/>
-          </a:bodyPr>
-          <a:lstStyle xmlns:a="http://schemas.openxmlformats.org/drawingml/2006/main"/>
-          <a:p xmlns:a="http://schemas.openxmlformats.org/drawingml/2006/main">
-            <a:pPr algn="ctr">
-              <a:defRPr sz="1575" b="1">
-                <a:solidFill>
-                  <a:srgbClr val="FFFFFF"/>
-                </a:solidFill>
-                <a:latin typeface="Microsoft YaHei"/>
-                <a:ea typeface="Microsoft YaHei"/>
-                <a:cs typeface="Microsoft YaHei"/>
-              </a:defRPr>
-            </a:pPr>
-            <a:r>
-              <a:rPr sz="1575" b="1">
-                <a:solidFill>
-                  <a:srgbClr val="FFFFFF"/>
-                </a:solidFill>
-                <a:latin typeface="Microsoft YaHei"/>
-                <a:ea typeface="Microsoft YaHei"/>
-                <a:cs typeface="Microsoft YaHei"/>
-              </a:rPr>
-              <a:t>总结</a:t>
-            </a:r>
-          </a:p>
-          <a:p xmlns:a="http://schemas.openxmlformats.org/drawingml/2006/main">
-            <a:pPr algn="ctr">
-              <a:defRPr sz="1575" b="1">
-                <a:solidFill>
-                  <a:srgbClr val="FFFFFF"/>
-                </a:solidFill>
-                <a:latin typeface="Microsoft YaHei"/>
-                <a:ea typeface="Microsoft YaHei"/>
-                <a:cs typeface="Microsoft YaHei"/>
-              </a:defRPr>
-            </a:pPr>
-            <a:r>
-              <a:rPr sz="1575" b="1">
-                <a:solidFill>
-                  <a:srgbClr val="FFFFFF"/>
-                </a:solidFill>
-                <a:latin typeface="Microsoft YaHei"/>
-                <a:ea typeface="Microsoft YaHei"/>
-                <a:cs typeface="Microsoft YaHei"/>
-              </a:rPr>
-              <a:t>持续改进</a:t>
+              <a:t>总目标向责任单元拆解，KPI 与最终贡献保持一一对应</a:t>
             </a:r>
           </a:p>
         </p:txBody>
@@ -2424,7 +4196,7 @@
     </p:spTree>
     <p:extLst>
       <p:ext uri="{BB962C8B-B14F-4D97-AF65-F5344CB8AC3E}">
-        <p14:creationId xmlns:p14="http://schemas.microsoft.com/office/powerpoint/2010/main" val="1691120291"/>
+        <p14:creationId xmlns:p14="http://schemas.microsoft.com/office/powerpoint/2010/main" val="1814741018"/>
       </p:ext>
     </p:extLst>
   </p:cSld>
